--- a/Dissertation/Materials/PNE_Presentation.pptx
+++ b/Dissertation/Materials/PNE_Presentation.pptx
@@ -10,8 +10,13 @@
     <p:sldId id="258" r:id="rId9"/>
     <p:sldId id="259" r:id="rId10"/>
     <p:sldId id="260" r:id="rId11"/>
+    <p:sldId id="266" r:id="rId17"/>
+    <p:sldId id="267" r:id="rId18"/>
+    <p:sldId id="268" r:id="rId19"/>
     <p:sldId id="261" r:id="rId12"/>
     <p:sldId id="262" r:id="rId13"/>
+    <p:sldId id="269" r:id="rId20"/>
+    <p:sldId id="270" r:id="rId21"/>
     <p:sldId id="263" r:id="rId14"/>
     <p:sldId id="264" r:id="rId15"/>
     <p:sldId id="265" r:id="rId16"/>
@@ -4363,6 +4368,6529 @@
                 </a:solidFill>
               </a:rPr>
               <a:t>  New York: Free Press.</a:t>
+            </a:r>
+          </a:p>
+        </p:txBody>
+      </p:sp>
+    </p:spTree>
+  </p:cSld>
+  <p:clrMapOvr>
+    <a:masterClrMapping/>
+  </p:clrMapOvr>
+</p:sld>
+</file>
+
+<file path=ppt/slides/slide11.xml><?xml version="1.0" encoding="utf-8"?>
+<p:sld xmlns:a="http://schemas.openxmlformats.org/drawingml/2006/main" xmlns:p="http://schemas.openxmlformats.org/presentationml/2006/main" xmlns:r="http://schemas.openxmlformats.org/officeDocument/2006/relationships">
+  <p:cSld>
+    <p:spTree>
+      <p:nvGrpSpPr>
+        <p:cNvPr id="1" name=""/>
+        <p:cNvGrpSpPr/>
+        <p:nvPr/>
+      </p:nvGrpSpPr>
+      <p:grpSpPr/>
+      <p:sp>
+        <p:nvSpPr>
+          <p:cNvPr id="2" name="Rectangle 1"/>
+          <p:cNvSpPr/>
+          <p:nvPr/>
+        </p:nvSpPr>
+        <p:spPr>
+          <a:xfrm>
+            <a:off x="0" y="0"/>
+            <a:ext cx="12188952" cy="1143000"/>
+          </a:xfrm>
+          <a:prstGeom prst="rect">
+            <a:avLst/>
+          </a:prstGeom>
+          <a:solidFill>
+            <a:srgbClr val="0D2B45"/>
+          </a:solidFill>
+          <a:ln>
+            <a:noFill/>
+          </a:ln>
+        </p:spPr>
+        <p:style>
+          <a:lnRef idx="1">
+            <a:schemeClr val="accent1"/>
+          </a:lnRef>
+          <a:fillRef idx="3">
+            <a:schemeClr val="accent1"/>
+          </a:fillRef>
+          <a:effectRef idx="2">
+            <a:schemeClr val="accent1"/>
+          </a:effectRef>
+          <a:fontRef idx="minor">
+            <a:schemeClr val="lt1"/>
+          </a:fontRef>
+        </p:style>
+        <p:txBody>
+          <a:bodyPr rtlCol="0" anchor="ctr"/>
+          <a:lstStyle/>
+          <a:p>
+            <a:pPr algn="ctr"/>
+          </a:p>
+        </p:txBody>
+      </p:sp>
+      <p:sp>
+        <p:nvSpPr>
+          <p:cNvPr id="3" name="Rectangle 2"/>
+          <p:cNvSpPr/>
+          <p:nvPr/>
+        </p:nvSpPr>
+        <p:spPr>
+          <a:xfrm>
+            <a:off x="0" y="1143000"/>
+            <a:ext cx="12188952" cy="54864"/>
+          </a:xfrm>
+          <a:prstGeom prst="rect">
+            <a:avLst/>
+          </a:prstGeom>
+          <a:solidFill>
+            <a:srgbClr val="2AB4C4"/>
+          </a:solidFill>
+          <a:ln>
+            <a:noFill/>
+          </a:ln>
+        </p:spPr>
+        <p:style>
+          <a:lnRef idx="1">
+            <a:schemeClr val="accent1"/>
+          </a:lnRef>
+          <a:fillRef idx="3">
+            <a:schemeClr val="accent1"/>
+          </a:fillRef>
+          <a:effectRef idx="2">
+            <a:schemeClr val="accent1"/>
+          </a:effectRef>
+          <a:fontRef idx="minor">
+            <a:schemeClr val="lt1"/>
+          </a:fontRef>
+        </p:style>
+        <p:txBody>
+          <a:bodyPr rtlCol="0" anchor="ctr"/>
+          <a:lstStyle/>
+          <a:p>
+            <a:pPr algn="ctr"/>
+          </a:p>
+        </p:txBody>
+      </p:sp>
+      <p:sp>
+        <p:nvSpPr>
+          <p:cNvPr id="4" name="Rectangle 3"/>
+          <p:cNvSpPr/>
+          <p:nvPr/>
+        </p:nvSpPr>
+        <p:spPr>
+          <a:xfrm>
+            <a:off x="0" y="1197864"/>
+            <a:ext cx="12188952" cy="5660136"/>
+          </a:xfrm>
+          <a:prstGeom prst="rect">
+            <a:avLst/>
+          </a:prstGeom>
+          <a:solidFill>
+            <a:srgbClr val="F4F6F9"/>
+          </a:solidFill>
+          <a:ln>
+            <a:noFill/>
+          </a:ln>
+        </p:spPr>
+        <p:style>
+          <a:lnRef idx="1">
+            <a:schemeClr val="accent1"/>
+          </a:lnRef>
+          <a:fillRef idx="3">
+            <a:schemeClr val="accent1"/>
+          </a:fillRef>
+          <a:effectRef idx="2">
+            <a:schemeClr val="accent1"/>
+          </a:effectRef>
+          <a:fontRef idx="minor">
+            <a:schemeClr val="lt1"/>
+          </a:fontRef>
+        </p:style>
+        <p:txBody>
+          <a:bodyPr rtlCol="0" anchor="ctr"/>
+          <a:lstStyle/>
+          <a:p>
+            <a:pPr algn="ctr"/>
+          </a:p>
+        </p:txBody>
+      </p:sp>
+      <p:sp>
+        <p:nvSpPr>
+          <p:cNvPr id="5" name="TextBox 4"/>
+          <p:cNvSpPr txBox="1"/>
+          <p:nvPr/>
+        </p:nvSpPr>
+        <p:spPr>
+          <a:xfrm>
+            <a:off x="300000" y="110000"/>
+            <a:ext cx="11500000" cy="750000"/>
+          </a:xfrm>
+          <a:prstGeom prst="rect">
+            <a:avLst/>
+          </a:prstGeom>
+          <a:noFill/>
+        </p:spPr>
+        <p:txBody>
+          <a:bodyPr wrap="square">
+            <a:spAutoFit/>
+          </a:bodyPr>
+          <a:lstStyle/>
+          <a:p>
+            <a:pPr algn="l"/>
+            <a:r>
+              <a:rPr b="1" i="0" sz="2800">
+                <a:solidFill>
+                  <a:srgbClr val="FFFFFF"/>
+                </a:solidFill>
+              </a:rPr>
+              <a:t>Architecture  —  Cognitive Layer</a:t>
+            </a:r>
+          </a:p>
+        </p:txBody>
+      </p:sp>
+      <p:sp>
+        <p:nvSpPr>
+          <p:cNvPr id="6" name="TextBox 5"/>
+          <p:cNvSpPr txBox="1"/>
+          <p:nvPr/>
+        </p:nvSpPr>
+        <p:spPr>
+          <a:xfrm>
+            <a:off x="300000" y="810000"/>
+            <a:ext cx="11500000" cy="320000"/>
+          </a:xfrm>
+          <a:prstGeom prst="rect">
+            <a:avLst/>
+          </a:prstGeom>
+          <a:noFill/>
+        </p:spPr>
+        <p:txBody>
+          <a:bodyPr wrap="square">
+            <a:spAutoFit/>
+          </a:bodyPr>
+          <a:lstStyle/>
+          <a:p>
+            <a:pPr algn="l"/>
+            <a:r>
+              <a:rPr b="0" i="0" sz="1100">
+                <a:solidFill>
+                  <a:srgbClr val="F4F6F9"/>
+                </a:solidFill>
+              </a:rPr>
+              <a:t>Stage III  |  "What does the NPC believe?"  |  Based on Ellis (1962) A-B-C  |  100% deterministic — no AI</a:t>
+            </a:r>
+          </a:p>
+        </p:txBody>
+      </p:sp>
+      <p:sp>
+        <p:nvSpPr>
+          <p:cNvPr id="7" name="Rectangle 6"/>
+          <p:cNvSpPr/>
+          <p:nvPr/>
+        </p:nvSpPr>
+        <p:spPr>
+          <a:xfrm>
+            <a:off x="220000" y="1297864"/>
+            <a:ext cx="3450000" cy="2050000"/>
+          </a:xfrm>
+          <a:prstGeom prst="rect">
+            <a:avLst/>
+          </a:prstGeom>
+          <a:solidFill>
+            <a:srgbClr val="FFFFFF"/>
+          </a:solidFill>
+          <a:ln>
+            <a:noFill/>
+          </a:ln>
+        </p:spPr>
+        <p:style>
+          <a:lnRef idx="1">
+            <a:schemeClr val="accent1"/>
+          </a:lnRef>
+          <a:fillRef idx="3">
+            <a:schemeClr val="accent1"/>
+          </a:fillRef>
+          <a:effectRef idx="2">
+            <a:schemeClr val="accent1"/>
+          </a:effectRef>
+          <a:fontRef idx="minor">
+            <a:schemeClr val="lt1"/>
+          </a:fontRef>
+        </p:style>
+        <p:txBody>
+          <a:bodyPr rtlCol="0" anchor="ctr"/>
+          <a:lstStyle/>
+          <a:p>
+            <a:pPr algn="ctr"/>
+          </a:p>
+        </p:txBody>
+      </p:sp>
+      <p:sp>
+        <p:nvSpPr>
+          <p:cNvPr id="8" name="Rectangle 7"/>
+          <p:cNvSpPr/>
+          <p:nvPr/>
+        </p:nvSpPr>
+        <p:spPr>
+          <a:xfrm>
+            <a:off x="220000" y="1297864"/>
+            <a:ext cx="3450000" cy="330000"/>
+          </a:xfrm>
+          <a:prstGeom prst="rect">
+            <a:avLst/>
+          </a:prstGeom>
+          <a:solidFill>
+            <a:srgbClr val="0D2B45"/>
+          </a:solidFill>
+          <a:ln>
+            <a:noFill/>
+          </a:ln>
+        </p:spPr>
+        <p:style>
+          <a:lnRef idx="1">
+            <a:schemeClr val="accent1"/>
+          </a:lnRef>
+          <a:fillRef idx="3">
+            <a:schemeClr val="accent1"/>
+          </a:fillRef>
+          <a:effectRef idx="2">
+            <a:schemeClr val="accent1"/>
+          </a:effectRef>
+          <a:fontRef idx="minor">
+            <a:schemeClr val="lt1"/>
+          </a:fontRef>
+        </p:style>
+        <p:txBody>
+          <a:bodyPr rtlCol="0" anchor="ctr"/>
+          <a:lstStyle/>
+          <a:p>
+            <a:pPr algn="ctr"/>
+          </a:p>
+        </p:txBody>
+      </p:sp>
+      <p:sp>
+        <p:nvSpPr>
+          <p:cNvPr id="9" name="TextBox 8"/>
+          <p:cNvSpPr txBox="1"/>
+          <p:nvPr/>
+        </p:nvSpPr>
+        <p:spPr>
+          <a:xfrm>
+            <a:off x="290000" y="1362864"/>
+            <a:ext cx="3310000" cy="280000"/>
+          </a:xfrm>
+          <a:prstGeom prst="rect">
+            <a:avLst/>
+          </a:prstGeom>
+          <a:noFill/>
+        </p:spPr>
+        <p:txBody>
+          <a:bodyPr wrap="square">
+            <a:spAutoFit/>
+          </a:bodyPr>
+          <a:lstStyle/>
+          <a:p>
+            <a:pPr algn="l"/>
+            <a:r>
+              <a:rPr b="1" i="0" sz="1100">
+                <a:solidFill>
+                  <a:srgbClr val="FFFFFF"/>
+                </a:solidFill>
+              </a:rPr>
+              <a:t>INPUT  —  what enters the layer</a:t>
+            </a:r>
+          </a:p>
+        </p:txBody>
+      </p:sp>
+      <p:sp>
+        <p:nvSpPr>
+          <p:cNvPr id="10" name="TextBox 9"/>
+          <p:cNvSpPr txBox="1"/>
+          <p:nvPr/>
+        </p:nvSpPr>
+        <p:spPr>
+          <a:xfrm>
+            <a:off x="290000" y="1687864"/>
+            <a:ext cx="3310000" cy="1620000"/>
+          </a:xfrm>
+          <a:prstGeom prst="rect">
+            <a:avLst/>
+          </a:prstGeom>
+          <a:noFill/>
+        </p:spPr>
+        <p:txBody>
+          <a:bodyPr wrap="square">
+            <a:spAutoFit/>
+          </a:bodyPr>
+          <a:lstStyle/>
+          <a:p>
+            <a:r>
+              <a:rPr b="0" sz="1100">
+                <a:solidFill>
+                  <a:srgbClr val="444455"/>
+                </a:solidFill>
+              </a:rPr>
+              <a:t>Player selects a dialogue option</a:t>
+            </a:r>
+          </a:p>
+          <a:p>
+            <a:r>
+              <a:rPr b="0" sz="1100">
+                <a:solidFill>
+                  <a:srgbClr val="444455"/>
+                </a:solidFill>
+              </a:rPr>
+              <a:t>Language Art: CHALLENGE / EMPATHETIC / DIPLOMATIC / MANIPULATIVE</a:t>
+            </a:r>
+          </a:p>
+          <a:p>
+            <a:r>
+              <a:rPr b="0" sz="1100">
+                <a:solidFill>
+                  <a:srgbClr val="444455"/>
+                </a:solidFill>
+              </a:rPr>
+              <a:t/>
+            </a:r>
+          </a:p>
+          <a:p>
+            <a:r>
+              <a:rPr b="0" sz="1100">
+                <a:solidFill>
+                  <a:srgbClr val="444455"/>
+                </a:solidFill>
+              </a:rPr>
+              <a:t>Four tone scores: authority, diplomacy, empathy, manipulation</a:t>
+            </a:r>
+          </a:p>
+          <a:p>
+            <a:r>
+              <a:rPr b="0" sz="1100">
+                <a:solidFill>
+                  <a:srgbClr val="444455"/>
+                </a:solidFill>
+              </a:rPr>
+              <a:t>Skill Check result: success or fail</a:t>
+            </a:r>
+          </a:p>
+          <a:p>
+            <a:r>
+              <a:rPr b="0" sz="1100">
+                <a:solidFill>
+                  <a:srgbClr val="444455"/>
+                </a:solidFill>
+              </a:rPr>
+              <a:t/>
+            </a:r>
+          </a:p>
+          <a:p>
+            <a:r>
+              <a:rPr b="1" sz="1100">
+                <a:solidFill>
+                  <a:srgbClr val="0D2B45"/>
+                </a:solidFill>
+              </a:rPr>
+              <a:t>NPC personality (shapes every match):</a:t>
+            </a:r>
+          </a:p>
+          <a:p>
+            <a:r>
+              <a:rPr b="0" sz="1100">
+                <a:solidFill>
+                  <a:srgbClr val="444455"/>
+                </a:solidFill>
+              </a:rPr>
+              <a:t>  self_esteem  |  locus_of_control  |  cog_flexibility</a:t>
+            </a:r>
+          </a:p>
+        </p:txBody>
+      </p:sp>
+      <p:sp>
+        <p:nvSpPr>
+          <p:cNvPr id="11" name="TextBox 10"/>
+          <p:cNvSpPr txBox="1"/>
+          <p:nvPr/>
+        </p:nvSpPr>
+        <p:spPr>
+          <a:xfrm>
+            <a:off x="3700000" y="2147864"/>
+            <a:ext cx="350000" cy="280000"/>
+          </a:xfrm>
+          <a:prstGeom prst="rect">
+            <a:avLst/>
+          </a:prstGeom>
+          <a:noFill/>
+        </p:spPr>
+        <p:txBody>
+          <a:bodyPr wrap="square">
+            <a:spAutoFit/>
+          </a:bodyPr>
+          <a:lstStyle/>
+          <a:p>
+            <a:pPr algn="ctr"/>
+            <a:r>
+              <a:rPr b="1" i="0" sz="2200">
+                <a:solidFill>
+                  <a:srgbClr val="2AB4C4"/>
+                </a:solidFill>
+              </a:rPr>
+              <a:t>→</a:t>
+            </a:r>
+          </a:p>
+        </p:txBody>
+      </p:sp>
+      <p:sp>
+        <p:nvSpPr>
+          <p:cNvPr id="12" name="Rectangle 11"/>
+          <p:cNvSpPr/>
+          <p:nvPr/>
+        </p:nvSpPr>
+        <p:spPr>
+          <a:xfrm>
+            <a:off x="4070000" y="1297864"/>
+            <a:ext cx="3600000" cy="2050000"/>
+          </a:xfrm>
+          <a:prstGeom prst="rect">
+            <a:avLst/>
+          </a:prstGeom>
+          <a:solidFill>
+            <a:srgbClr val="FFFFFF"/>
+          </a:solidFill>
+          <a:ln>
+            <a:noFill/>
+          </a:ln>
+        </p:spPr>
+        <p:style>
+          <a:lnRef idx="1">
+            <a:schemeClr val="accent1"/>
+          </a:lnRef>
+          <a:fillRef idx="3">
+            <a:schemeClr val="accent1"/>
+          </a:fillRef>
+          <a:effectRef idx="2">
+            <a:schemeClr val="accent1"/>
+          </a:effectRef>
+          <a:fontRef idx="minor">
+            <a:schemeClr val="lt1"/>
+          </a:fontRef>
+        </p:style>
+        <p:txBody>
+          <a:bodyPr rtlCol="0" anchor="ctr"/>
+          <a:lstStyle/>
+          <a:p>
+            <a:pPr algn="ctr"/>
+          </a:p>
+        </p:txBody>
+      </p:sp>
+      <p:sp>
+        <p:nvSpPr>
+          <p:cNvPr id="13" name="Rectangle 12"/>
+          <p:cNvSpPr/>
+          <p:nvPr/>
+        </p:nvSpPr>
+        <p:spPr>
+          <a:xfrm>
+            <a:off x="4070000" y="1297864"/>
+            <a:ext cx="3600000" cy="330000"/>
+          </a:xfrm>
+          <a:prstGeom prst="rect">
+            <a:avLst/>
+          </a:prstGeom>
+          <a:solidFill>
+            <a:srgbClr val="0D2B45"/>
+          </a:solidFill>
+          <a:ln>
+            <a:noFill/>
+          </a:ln>
+        </p:spPr>
+        <p:style>
+          <a:lnRef idx="1">
+            <a:schemeClr val="accent1"/>
+          </a:lnRef>
+          <a:fillRef idx="3">
+            <a:schemeClr val="accent1"/>
+          </a:fillRef>
+          <a:effectRef idx="2">
+            <a:schemeClr val="accent1"/>
+          </a:effectRef>
+          <a:fontRef idx="minor">
+            <a:schemeClr val="lt1"/>
+          </a:fontRef>
+        </p:style>
+        <p:txBody>
+          <a:bodyPr rtlCol="0" anchor="ctr"/>
+          <a:lstStyle/>
+          <a:p>
+            <a:pPr algn="ctr"/>
+          </a:p>
+        </p:txBody>
+      </p:sp>
+      <p:sp>
+        <p:nvSpPr>
+          <p:cNvPr id="14" name="TextBox 13"/>
+          <p:cNvSpPr txBox="1"/>
+          <p:nvPr/>
+        </p:nvSpPr>
+        <p:spPr>
+          <a:xfrm>
+            <a:off x="4140000" y="1362864"/>
+            <a:ext cx="3460000" cy="280000"/>
+          </a:xfrm>
+          <a:prstGeom prst="rect">
+            <a:avLst/>
+          </a:prstGeom>
+          <a:noFill/>
+        </p:spPr>
+        <p:txBody>
+          <a:bodyPr wrap="square">
+            <a:spAutoFit/>
+          </a:bodyPr>
+          <a:lstStyle/>
+          <a:p>
+            <a:pPr algn="l"/>
+            <a:r>
+              <a:rPr b="1" i="0" sz="1100">
+                <a:solidFill>
+                  <a:srgbClr val="FFFFFF"/>
+                </a:solidFill>
+              </a:rPr>
+              <a:t>CognitiveThoughtMatcher  (no AI)</a:t>
+            </a:r>
+          </a:p>
+        </p:txBody>
+      </p:sp>
+      <p:sp>
+        <p:nvSpPr>
+          <p:cNvPr id="15" name="TextBox 14"/>
+          <p:cNvSpPr txBox="1"/>
+          <p:nvPr/>
+        </p:nvSpPr>
+        <p:spPr>
+          <a:xfrm>
+            <a:off x="4140000" y="1687864"/>
+            <a:ext cx="3460000" cy="1620000"/>
+          </a:xfrm>
+          <a:prstGeom prst="rect">
+            <a:avLst/>
+          </a:prstGeom>
+          <a:noFill/>
+        </p:spPr>
+        <p:txBody>
+          <a:bodyPr wrap="square">
+            <a:spAutoFit/>
+          </a:bodyPr>
+          <a:lstStyle/>
+          <a:p>
+            <a:r>
+              <a:rPr b="1" sz="1100">
+                <a:solidFill>
+                  <a:srgbClr val="0D2B45"/>
+                </a:solidFill>
+              </a:rPr>
+              <a:t>810 pre-authored thought templates</a:t>
+            </a:r>
+          </a:p>
+          <a:p>
+            <a:r>
+              <a:rPr b="0" sz="1100">
+                <a:solidFill>
+                  <a:srgbClr val="444455"/>
+                </a:solidFill>
+              </a:rPr>
+              <a:t/>
+            </a:r>
+          </a:p>
+          <a:p>
+            <a:r>
+              <a:rPr b="0" sz="1100">
+                <a:solidFill>
+                  <a:srgbClr val="444455"/>
+                </a:solidFill>
+              </a:rPr>
+              <a:t>Each template has:</a:t>
+            </a:r>
+          </a:p>
+          <a:p>
+            <a:r>
+              <a:rPr b="0" sz="1100">
+                <a:solidFill>
+                  <a:srgbClr val="444455"/>
+                </a:solidFill>
+              </a:rPr>
+              <a:t>  bias_type  |  match_weights  |  thought text</a:t>
+            </a:r>
+          </a:p>
+          <a:p>
+            <a:r>
+              <a:rPr b="0" sz="1100">
+                <a:solidFill>
+                  <a:srgbClr val="444455"/>
+                </a:solidFill>
+              </a:rPr>
+              <a:t/>
+            </a:r>
+          </a:p>
+          <a:p>
+            <a:r>
+              <a:rPr b="0" sz="1100">
+                <a:solidFill>
+                  <a:srgbClr val="444455"/>
+                </a:solidFill>
+              </a:rPr>
+              <a:t>Scoring: weights × (player tone + NPC params)</a:t>
+            </a:r>
+          </a:p>
+          <a:p>
+            <a:r>
+              <a:rPr b="1" sz="1100">
+                <a:solidFill>
+                  <a:srgbClr val="1E6FA8"/>
+                </a:solidFill>
+              </a:rPr>
+              <a:t>Best-matching template selected deterministically</a:t>
+            </a:r>
+          </a:p>
+          <a:p>
+            <a:r>
+              <a:rPr b="0" sz="1100">
+                <a:solidFill>
+                  <a:srgbClr val="444455"/>
+                </a:solidFill>
+              </a:rPr>
+              <a:t/>
+            </a:r>
+          </a:p>
+          <a:p>
+            <a:r>
+              <a:rPr b="0" sz="1100">
+                <a:solidFill>
+                  <a:srgbClr val="444455"/>
+                </a:solidFill>
+              </a:rPr>
+              <a:t>Different NPC profiles → provably different outputs</a:t>
+            </a:r>
+          </a:p>
+        </p:txBody>
+      </p:sp>
+      <p:sp>
+        <p:nvSpPr>
+          <p:cNvPr id="16" name="TextBox 15"/>
+          <p:cNvSpPr txBox="1"/>
+          <p:nvPr/>
+        </p:nvSpPr>
+        <p:spPr>
+          <a:xfrm>
+            <a:off x="7700000" y="2147864"/>
+            <a:ext cx="350000" cy="280000"/>
+          </a:xfrm>
+          <a:prstGeom prst="rect">
+            <a:avLst/>
+          </a:prstGeom>
+          <a:noFill/>
+        </p:spPr>
+        <p:txBody>
+          <a:bodyPr wrap="square">
+            <a:spAutoFit/>
+          </a:bodyPr>
+          <a:lstStyle/>
+          <a:p>
+            <a:pPr algn="ctr"/>
+            <a:r>
+              <a:rPr b="1" i="0" sz="2200">
+                <a:solidFill>
+                  <a:srgbClr val="2AB4C4"/>
+                </a:solidFill>
+              </a:rPr>
+              <a:t>→</a:t>
+            </a:r>
+          </a:p>
+        </p:txBody>
+      </p:sp>
+      <p:sp>
+        <p:nvSpPr>
+          <p:cNvPr id="17" name="Rectangle 16"/>
+          <p:cNvSpPr/>
+          <p:nvPr/>
+        </p:nvSpPr>
+        <p:spPr>
+          <a:xfrm>
+            <a:off x="8070000" y="1297864"/>
+            <a:ext cx="3898952" cy="2050000"/>
+          </a:xfrm>
+          <a:prstGeom prst="rect">
+            <a:avLst/>
+          </a:prstGeom>
+          <a:solidFill>
+            <a:srgbClr val="FFFFFF"/>
+          </a:solidFill>
+          <a:ln>
+            <a:noFill/>
+          </a:ln>
+        </p:spPr>
+        <p:style>
+          <a:lnRef idx="1">
+            <a:schemeClr val="accent1"/>
+          </a:lnRef>
+          <a:fillRef idx="3">
+            <a:schemeClr val="accent1"/>
+          </a:fillRef>
+          <a:effectRef idx="2">
+            <a:schemeClr val="accent1"/>
+          </a:effectRef>
+          <a:fontRef idx="minor">
+            <a:schemeClr val="lt1"/>
+          </a:fontRef>
+        </p:style>
+        <p:txBody>
+          <a:bodyPr rtlCol="0" anchor="ctr"/>
+          <a:lstStyle/>
+          <a:p>
+            <a:pPr algn="ctr"/>
+          </a:p>
+        </p:txBody>
+      </p:sp>
+      <p:sp>
+        <p:nvSpPr>
+          <p:cNvPr id="18" name="Rectangle 17"/>
+          <p:cNvSpPr/>
+          <p:nvPr/>
+        </p:nvSpPr>
+        <p:spPr>
+          <a:xfrm>
+            <a:off x="8070000" y="1297864"/>
+            <a:ext cx="3898952" cy="330000"/>
+          </a:xfrm>
+          <a:prstGeom prst="rect">
+            <a:avLst/>
+          </a:prstGeom>
+          <a:solidFill>
+            <a:srgbClr val="0D2B45"/>
+          </a:solidFill>
+          <a:ln>
+            <a:noFill/>
+          </a:ln>
+        </p:spPr>
+        <p:style>
+          <a:lnRef idx="1">
+            <a:schemeClr val="accent1"/>
+          </a:lnRef>
+          <a:fillRef idx="3">
+            <a:schemeClr val="accent1"/>
+          </a:fillRef>
+          <a:effectRef idx="2">
+            <a:schemeClr val="accent1"/>
+          </a:effectRef>
+          <a:fontRef idx="minor">
+            <a:schemeClr val="lt1"/>
+          </a:fontRef>
+        </p:style>
+        <p:txBody>
+          <a:bodyPr rtlCol="0" anchor="ctr"/>
+          <a:lstStyle/>
+          <a:p>
+            <a:pPr algn="ctr"/>
+          </a:p>
+        </p:txBody>
+      </p:sp>
+      <p:sp>
+        <p:nvSpPr>
+          <p:cNvPr id="19" name="TextBox 18"/>
+          <p:cNvSpPr txBox="1"/>
+          <p:nvPr/>
+        </p:nvSpPr>
+        <p:spPr>
+          <a:xfrm>
+            <a:off x="8140000" y="1362864"/>
+            <a:ext cx="3758952" cy="280000"/>
+          </a:xfrm>
+          <a:prstGeom prst="rect">
+            <a:avLst/>
+          </a:prstGeom>
+          <a:noFill/>
+        </p:spPr>
+        <p:txBody>
+          <a:bodyPr wrap="square">
+            <a:spAutoFit/>
+          </a:bodyPr>
+          <a:lstStyle/>
+          <a:p>
+            <a:pPr algn="l"/>
+            <a:r>
+              <a:rPr b="1" i="0" sz="1100">
+                <a:solidFill>
+                  <a:srgbClr val="FFFFFF"/>
+                </a:solidFill>
+              </a:rPr>
+              <a:t>OUTPUT  —  four values produced</a:t>
+            </a:r>
+          </a:p>
+        </p:txBody>
+      </p:sp>
+      <p:sp>
+        <p:nvSpPr>
+          <p:cNvPr id="20" name="TextBox 19"/>
+          <p:cNvSpPr txBox="1"/>
+          <p:nvPr/>
+        </p:nvSpPr>
+        <p:spPr>
+          <a:xfrm>
+            <a:off x="8140000" y="1687864"/>
+            <a:ext cx="3758952" cy="1620000"/>
+          </a:xfrm>
+          <a:prstGeom prst="rect">
+            <a:avLst/>
+          </a:prstGeom>
+          <a:noFill/>
+        </p:spPr>
+        <p:txBody>
+          <a:bodyPr wrap="square">
+            <a:spAutoFit/>
+          </a:bodyPr>
+          <a:lstStyle/>
+          <a:p>
+            <a:r>
+              <a:rPr b="1" sz="1100">
+                <a:solidFill>
+                  <a:srgbClr val="0D2B45"/>
+                </a:solidFill>
+              </a:rPr>
+              <a:t>internal_thought</a:t>
+            </a:r>
+          </a:p>
+          <a:p>
+            <a:r>
+              <a:rPr b="0" sz="1100">
+                <a:solidFill>
+                  <a:srgbClr val="444455"/>
+                </a:solidFill>
+              </a:rPr>
+              <a:t>  NPC's private first-person reaction</a:t>
+            </a:r>
+          </a:p>
+          <a:p>
+            <a:r>
+              <a:rPr b="0" sz="1100">
+                <a:solidFill>
+                  <a:srgbClr val="444455"/>
+                </a:solidFill>
+              </a:rPr>
+              <a:t/>
+            </a:r>
+          </a:p>
+          <a:p>
+            <a:r>
+              <a:rPr b="1" sz="1100">
+                <a:solidFill>
+                  <a:srgbClr val="1E6FA8"/>
+                </a:solidFill>
+              </a:rPr>
+              <a:t>subjective_belief  ← KEY VALUE</a:t>
+            </a:r>
+          </a:p>
+          <a:p>
+            <a:r>
+              <a:rPr b="0" sz="1100">
+                <a:solidFill>
+                  <a:srgbClr val="444455"/>
+                </a:solidFill>
+              </a:rPr>
+              <a:t>  What the NPC thinks of the player's intent</a:t>
+            </a:r>
+          </a:p>
+          <a:p>
+            <a:r>
+              <a:rPr b="0" sz="1100">
+                <a:solidFill>
+                  <a:srgbClr val="444455"/>
+                </a:solidFill>
+              </a:rPr>
+              <a:t>  (keyword-rich — drives the desire layer)</a:t>
+            </a:r>
+          </a:p>
+          <a:p>
+            <a:r>
+              <a:rPr b="0" sz="1100">
+                <a:solidFill>
+                  <a:srgbClr val="444455"/>
+                </a:solidFill>
+              </a:rPr>
+              <a:t/>
+            </a:r>
+          </a:p>
+          <a:p>
+            <a:r>
+              <a:rPr b="0" sz="1100">
+                <a:solidFill>
+                  <a:srgbClr val="444455"/>
+                </a:solidFill>
+              </a:rPr>
+              <a:t>emotional_valence   −1.0 to +1.0</a:t>
+            </a:r>
+          </a:p>
+          <a:p>
+            <a:r>
+              <a:rPr b="0" sz="1100">
+                <a:solidFill>
+                  <a:srgbClr val="444455"/>
+                </a:solidFill>
+              </a:rPr>
+              <a:t>cognitive_bias      e.g. black_white_thinking</a:t>
+            </a:r>
+          </a:p>
+        </p:txBody>
+      </p:sp>
+      <p:sp>
+        <p:nvSpPr>
+          <p:cNvPr id="21" name="Rectangle 20"/>
+          <p:cNvSpPr/>
+          <p:nvPr/>
+        </p:nvSpPr>
+        <p:spPr>
+          <a:xfrm>
+            <a:off x="220000" y="3447864"/>
+            <a:ext cx="5774476" cy="3330136"/>
+          </a:xfrm>
+          <a:prstGeom prst="rect">
+            <a:avLst/>
+          </a:prstGeom>
+          <a:solidFill>
+            <a:srgbClr val="FFFFFF"/>
+          </a:solidFill>
+          <a:ln>
+            <a:noFill/>
+          </a:ln>
+        </p:spPr>
+        <p:style>
+          <a:lnRef idx="1">
+            <a:schemeClr val="accent1"/>
+          </a:lnRef>
+          <a:fillRef idx="3">
+            <a:schemeClr val="accent1"/>
+          </a:fillRef>
+          <a:effectRef idx="2">
+            <a:schemeClr val="accent1"/>
+          </a:effectRef>
+          <a:fontRef idx="minor">
+            <a:schemeClr val="lt1"/>
+          </a:fontRef>
+        </p:style>
+        <p:txBody>
+          <a:bodyPr rtlCol="0" anchor="ctr"/>
+          <a:lstStyle/>
+          <a:p>
+            <a:pPr algn="ctr"/>
+          </a:p>
+        </p:txBody>
+      </p:sp>
+      <p:sp>
+        <p:nvSpPr>
+          <p:cNvPr id="22" name="Rectangle 21"/>
+          <p:cNvSpPr/>
+          <p:nvPr/>
+        </p:nvSpPr>
+        <p:spPr>
+          <a:xfrm>
+            <a:off x="220000" y="3447864"/>
+            <a:ext cx="5774476" cy="330000"/>
+          </a:xfrm>
+          <a:prstGeom prst="rect">
+            <a:avLst/>
+          </a:prstGeom>
+          <a:solidFill>
+            <a:srgbClr val="0D2B45"/>
+          </a:solidFill>
+          <a:ln>
+            <a:noFill/>
+          </a:ln>
+        </p:spPr>
+        <p:style>
+          <a:lnRef idx="1">
+            <a:schemeClr val="accent1"/>
+          </a:lnRef>
+          <a:fillRef idx="3">
+            <a:schemeClr val="accent1"/>
+          </a:fillRef>
+          <a:effectRef idx="2">
+            <a:schemeClr val="accent1"/>
+          </a:effectRef>
+          <a:fontRef idx="minor">
+            <a:schemeClr val="lt1"/>
+          </a:fontRef>
+        </p:style>
+        <p:txBody>
+          <a:bodyPr rtlCol="0" anchor="ctr"/>
+          <a:lstStyle/>
+          <a:p>
+            <a:pPr algn="ctr"/>
+          </a:p>
+        </p:txBody>
+      </p:sp>
+      <p:sp>
+        <p:nvSpPr>
+          <p:cNvPr id="23" name="TextBox 22"/>
+          <p:cNvSpPr txBox="1"/>
+          <p:nvPr/>
+        </p:nvSpPr>
+        <p:spPr>
+          <a:xfrm>
+            <a:off x="290000" y="3512864"/>
+            <a:ext cx="5634476" cy="280000"/>
+          </a:xfrm>
+          <a:prstGeom prst="rect">
+            <a:avLst/>
+          </a:prstGeom>
+          <a:noFill/>
+        </p:spPr>
+        <p:txBody>
+          <a:bodyPr wrap="square">
+            <a:spAutoFit/>
+          </a:bodyPr>
+          <a:lstStyle/>
+          <a:p>
+            <a:pPr algn="l"/>
+            <a:r>
+              <a:rPr b="1" i="0" sz="1100">
+                <a:solidFill>
+                  <a:srgbClr val="FFFFFF"/>
+                </a:solidFill>
+              </a:rPr>
+              <a:t>Theory — Ellis (1962) A-B-C</a:t>
+            </a:r>
+          </a:p>
+        </p:txBody>
+      </p:sp>
+      <p:sp>
+        <p:nvSpPr>
+          <p:cNvPr id="24" name="TextBox 23"/>
+          <p:cNvSpPr txBox="1"/>
+          <p:nvPr/>
+        </p:nvSpPr>
+        <p:spPr>
+          <a:xfrm>
+            <a:off x="290000" y="3837864"/>
+            <a:ext cx="5634476" cy="2900136"/>
+          </a:xfrm>
+          <a:prstGeom prst="rect">
+            <a:avLst/>
+          </a:prstGeom>
+          <a:noFill/>
+        </p:spPr>
+        <p:txBody>
+          <a:bodyPr wrap="square">
+            <a:spAutoFit/>
+          </a:bodyPr>
+          <a:lstStyle/>
+          <a:p>
+            <a:r>
+              <a:rPr b="0" sz="1100">
+                <a:solidFill>
+                  <a:srgbClr val="444455"/>
+                </a:solidFill>
+              </a:rPr>
+              <a:t>A  =  Activating event  →  player's dialogue choice</a:t>
+            </a:r>
+          </a:p>
+          <a:p>
+            <a:r>
+              <a:rPr b="1" sz="1100">
+                <a:solidFill>
+                  <a:srgbClr val="0D2B45"/>
+                </a:solidFill>
+              </a:rPr>
+              <a:t>B  =  Belief            →  NPC's subjective interpretation  ← THIS LAYER</a:t>
+            </a:r>
+          </a:p>
+          <a:p>
+            <a:r>
+              <a:rPr b="0" sz="1100">
+                <a:solidFill>
+                  <a:srgbClr val="444455"/>
+                </a:solidFill>
+              </a:rPr>
+              <a:t>C  =  Consequence       →  emotional valence + desire formation (next layer)</a:t>
+            </a:r>
+          </a:p>
+          <a:p>
+            <a:r>
+              <a:rPr b="0" sz="1100">
+                <a:solidFill>
+                  <a:srgbClr val="444455"/>
+                </a:solidFill>
+              </a:rPr>
+              <a:t/>
+            </a:r>
+          </a:p>
+          <a:p>
+            <a:r>
+              <a:rPr b="1" sz="1100">
+                <a:solidFill>
+                  <a:srgbClr val="1E6FA8"/>
+                </a:solidFill>
+              </a:rPr>
+              <a:t>The cognitive layer IS the "B" — it mediates everything.</a:t>
+            </a:r>
+          </a:p>
+        </p:txBody>
+      </p:sp>
+      <p:sp>
+        <p:nvSpPr>
+          <p:cNvPr id="25" name="Rectangle 24"/>
+          <p:cNvSpPr/>
+          <p:nvPr/>
+        </p:nvSpPr>
+        <p:spPr>
+          <a:xfrm>
+            <a:off x="6194476" y="3447864"/>
+            <a:ext cx="5774476" cy="3330136"/>
+          </a:xfrm>
+          <a:prstGeom prst="rect">
+            <a:avLst/>
+          </a:prstGeom>
+          <a:solidFill>
+            <a:srgbClr val="FFFFFF"/>
+          </a:solidFill>
+          <a:ln>
+            <a:noFill/>
+          </a:ln>
+        </p:spPr>
+        <p:style>
+          <a:lnRef idx="1">
+            <a:schemeClr val="accent1"/>
+          </a:lnRef>
+          <a:fillRef idx="3">
+            <a:schemeClr val="accent1"/>
+          </a:fillRef>
+          <a:effectRef idx="2">
+            <a:schemeClr val="accent1"/>
+          </a:effectRef>
+          <a:fontRef idx="minor">
+            <a:schemeClr val="lt1"/>
+          </a:fontRef>
+        </p:style>
+        <p:txBody>
+          <a:bodyPr rtlCol="0" anchor="ctr"/>
+          <a:lstStyle/>
+          <a:p>
+            <a:pPr algn="ctr"/>
+          </a:p>
+        </p:txBody>
+      </p:sp>
+      <p:sp>
+        <p:nvSpPr>
+          <p:cNvPr id="26" name="Rectangle 25"/>
+          <p:cNvSpPr/>
+          <p:nvPr/>
+        </p:nvSpPr>
+        <p:spPr>
+          <a:xfrm>
+            <a:off x="6194476" y="3447864"/>
+            <a:ext cx="5774476" cy="330000"/>
+          </a:xfrm>
+          <a:prstGeom prst="rect">
+            <a:avLst/>
+          </a:prstGeom>
+          <a:solidFill>
+            <a:srgbClr val="0D2B45"/>
+          </a:solidFill>
+          <a:ln>
+            <a:noFill/>
+          </a:ln>
+        </p:spPr>
+        <p:style>
+          <a:lnRef idx="1">
+            <a:schemeClr val="accent1"/>
+          </a:lnRef>
+          <a:fillRef idx="3">
+            <a:schemeClr val="accent1"/>
+          </a:fillRef>
+          <a:effectRef idx="2">
+            <a:schemeClr val="accent1"/>
+          </a:effectRef>
+          <a:fontRef idx="minor">
+            <a:schemeClr val="lt1"/>
+          </a:fontRef>
+        </p:style>
+        <p:txBody>
+          <a:bodyPr rtlCol="0" anchor="ctr"/>
+          <a:lstStyle/>
+          <a:p>
+            <a:pPr algn="ctr"/>
+          </a:p>
+        </p:txBody>
+      </p:sp>
+      <p:sp>
+        <p:nvSpPr>
+          <p:cNvPr id="27" name="TextBox 26"/>
+          <p:cNvSpPr txBox="1"/>
+          <p:nvPr/>
+        </p:nvSpPr>
+        <p:spPr>
+          <a:xfrm>
+            <a:off x="6264476" y="3512864"/>
+            <a:ext cx="5634476" cy="280000"/>
+          </a:xfrm>
+          <a:prstGeom prst="rect">
+            <a:avLst/>
+          </a:prstGeom>
+          <a:noFill/>
+        </p:spPr>
+        <p:txBody>
+          <a:bodyPr wrap="square">
+            <a:spAutoFit/>
+          </a:bodyPr>
+          <a:lstStyle/>
+          <a:p>
+            <a:pPr algn="l"/>
+            <a:r>
+              <a:rPr b="1" i="0" sz="1100">
+                <a:solidFill>
+                  <a:srgbClr val="FFFFFF"/>
+                </a:solidFill>
+              </a:rPr>
+              <a:t>Memory Hook  —  say it to yourself:</a:t>
+            </a:r>
+          </a:p>
+        </p:txBody>
+      </p:sp>
+      <p:sp>
+        <p:nvSpPr>
+          <p:cNvPr id="28" name="TextBox 27"/>
+          <p:cNvSpPr txBox="1"/>
+          <p:nvPr/>
+        </p:nvSpPr>
+        <p:spPr>
+          <a:xfrm>
+            <a:off x="6264476" y="3837864"/>
+            <a:ext cx="5634476" cy="2900136"/>
+          </a:xfrm>
+          <a:prstGeom prst="rect">
+            <a:avLst/>
+          </a:prstGeom>
+          <a:noFill/>
+        </p:spPr>
+        <p:txBody>
+          <a:bodyPr wrap="square">
+            <a:spAutoFit/>
+          </a:bodyPr>
+          <a:lstStyle/>
+          <a:p>
+            <a:r>
+              <a:rPr b="1" sz="1100">
+                <a:solidFill>
+                  <a:srgbClr val="0D2B45"/>
+                </a:solidFill>
+              </a:rPr>
+              <a:t>"The brain reads the room, forms a belief, and feels something"</a:t>
+            </a:r>
+          </a:p>
+          <a:p>
+            <a:r>
+              <a:rPr b="0" sz="1100">
+                <a:solidFill>
+                  <a:srgbClr val="444455"/>
+                </a:solidFill>
+              </a:rPr>
+              <a:t/>
+            </a:r>
+          </a:p>
+          <a:p>
+            <a:r>
+              <a:rPr b="0" sz="1100">
+                <a:solidFill>
+                  <a:srgbClr val="444455"/>
+                </a:solidFill>
+              </a:rPr>
+              <a:t>Same player words → DIFFERENT belief for Krakk vs Moses</a:t>
+            </a:r>
+          </a:p>
+          <a:p>
+            <a:r>
+              <a:rPr b="0" sz="1100">
+                <a:solidFill>
+                  <a:srgbClr val="444455"/>
+                </a:solidFill>
+              </a:rPr>
+              <a:t>because personality shapes which template wins.</a:t>
+            </a:r>
+          </a:p>
+          <a:p>
+            <a:r>
+              <a:rPr b="0" sz="1100">
+                <a:solidFill>
+                  <a:srgbClr val="444455"/>
+                </a:solidFill>
+              </a:rPr>
+              <a:t/>
+            </a:r>
+          </a:p>
+          <a:p>
+            <a:r>
+              <a:rPr b="1" sz="1100">
+                <a:solidFill>
+                  <a:srgbClr val="2AB4C4"/>
+                </a:solidFill>
+              </a:rPr>
+              <a:t>NO AI  =  NO hallucination in the reasoning stage.</a:t>
+            </a:r>
+          </a:p>
+        </p:txBody>
+      </p:sp>
+    </p:spTree>
+  </p:cSld>
+  <p:clrMapOvr>
+    <a:masterClrMapping/>
+  </p:clrMapOvr>
+</p:sld>
+</file>
+
+<file path=ppt/slides/slide12.xml><?xml version="1.0" encoding="utf-8"?>
+<p:sld xmlns:a="http://schemas.openxmlformats.org/drawingml/2006/main" xmlns:p="http://schemas.openxmlformats.org/presentationml/2006/main" xmlns:r="http://schemas.openxmlformats.org/officeDocument/2006/relationships">
+  <p:cSld>
+    <p:spTree>
+      <p:nvGrpSpPr>
+        <p:cNvPr id="1" name=""/>
+        <p:cNvGrpSpPr/>
+        <p:nvPr/>
+      </p:nvGrpSpPr>
+      <p:grpSpPr/>
+      <p:sp>
+        <p:nvSpPr>
+          <p:cNvPr id="2" name="Rectangle 1"/>
+          <p:cNvSpPr/>
+          <p:nvPr/>
+        </p:nvSpPr>
+        <p:spPr>
+          <a:xfrm>
+            <a:off x="0" y="0"/>
+            <a:ext cx="12188952" cy="1143000"/>
+          </a:xfrm>
+          <a:prstGeom prst="rect">
+            <a:avLst/>
+          </a:prstGeom>
+          <a:solidFill>
+            <a:srgbClr val="0D2B45"/>
+          </a:solidFill>
+          <a:ln>
+            <a:noFill/>
+          </a:ln>
+        </p:spPr>
+        <p:style>
+          <a:lnRef idx="1">
+            <a:schemeClr val="accent1"/>
+          </a:lnRef>
+          <a:fillRef idx="3">
+            <a:schemeClr val="accent1"/>
+          </a:fillRef>
+          <a:effectRef idx="2">
+            <a:schemeClr val="accent1"/>
+          </a:effectRef>
+          <a:fontRef idx="minor">
+            <a:schemeClr val="lt1"/>
+          </a:fontRef>
+        </p:style>
+        <p:txBody>
+          <a:bodyPr rtlCol="0" anchor="ctr"/>
+          <a:lstStyle/>
+          <a:p>
+            <a:pPr algn="ctr"/>
+          </a:p>
+        </p:txBody>
+      </p:sp>
+      <p:sp>
+        <p:nvSpPr>
+          <p:cNvPr id="3" name="Rectangle 2"/>
+          <p:cNvSpPr/>
+          <p:nvPr/>
+        </p:nvSpPr>
+        <p:spPr>
+          <a:xfrm>
+            <a:off x="0" y="1143000"/>
+            <a:ext cx="12188952" cy="54864"/>
+          </a:xfrm>
+          <a:prstGeom prst="rect">
+            <a:avLst/>
+          </a:prstGeom>
+          <a:solidFill>
+            <a:srgbClr val="2AB4C4"/>
+          </a:solidFill>
+          <a:ln>
+            <a:noFill/>
+          </a:ln>
+        </p:spPr>
+        <p:style>
+          <a:lnRef idx="1">
+            <a:schemeClr val="accent1"/>
+          </a:lnRef>
+          <a:fillRef idx="3">
+            <a:schemeClr val="accent1"/>
+          </a:fillRef>
+          <a:effectRef idx="2">
+            <a:schemeClr val="accent1"/>
+          </a:effectRef>
+          <a:fontRef idx="minor">
+            <a:schemeClr val="lt1"/>
+          </a:fontRef>
+        </p:style>
+        <p:txBody>
+          <a:bodyPr rtlCol="0" anchor="ctr"/>
+          <a:lstStyle/>
+          <a:p>
+            <a:pPr algn="ctr"/>
+          </a:p>
+        </p:txBody>
+      </p:sp>
+      <p:sp>
+        <p:nvSpPr>
+          <p:cNvPr id="4" name="Rectangle 3"/>
+          <p:cNvSpPr/>
+          <p:nvPr/>
+        </p:nvSpPr>
+        <p:spPr>
+          <a:xfrm>
+            <a:off x="0" y="1197864"/>
+            <a:ext cx="12188952" cy="5660136"/>
+          </a:xfrm>
+          <a:prstGeom prst="rect">
+            <a:avLst/>
+          </a:prstGeom>
+          <a:solidFill>
+            <a:srgbClr val="F4F6F9"/>
+          </a:solidFill>
+          <a:ln>
+            <a:noFill/>
+          </a:ln>
+        </p:spPr>
+        <p:style>
+          <a:lnRef idx="1">
+            <a:schemeClr val="accent1"/>
+          </a:lnRef>
+          <a:fillRef idx="3">
+            <a:schemeClr val="accent1"/>
+          </a:fillRef>
+          <a:effectRef idx="2">
+            <a:schemeClr val="accent1"/>
+          </a:effectRef>
+          <a:fontRef idx="minor">
+            <a:schemeClr val="lt1"/>
+          </a:fontRef>
+        </p:style>
+        <p:txBody>
+          <a:bodyPr rtlCol="0" anchor="ctr"/>
+          <a:lstStyle/>
+          <a:p>
+            <a:pPr algn="ctr"/>
+          </a:p>
+        </p:txBody>
+      </p:sp>
+      <p:sp>
+        <p:nvSpPr>
+          <p:cNvPr id="5" name="TextBox 4"/>
+          <p:cNvSpPr txBox="1"/>
+          <p:nvPr/>
+        </p:nvSpPr>
+        <p:spPr>
+          <a:xfrm>
+            <a:off x="300000" y="110000"/>
+            <a:ext cx="11500000" cy="750000"/>
+          </a:xfrm>
+          <a:prstGeom prst="rect">
+            <a:avLst/>
+          </a:prstGeom>
+          <a:noFill/>
+        </p:spPr>
+        <p:txBody>
+          <a:bodyPr wrap="square">
+            <a:spAutoFit/>
+          </a:bodyPr>
+          <a:lstStyle/>
+          <a:p>
+            <a:pPr algn="l"/>
+            <a:r>
+              <a:rPr b="1" i="0" sz="2800">
+                <a:solidFill>
+                  <a:srgbClr val="FFFFFF"/>
+                </a:solidFill>
+              </a:rPr>
+              <a:t>Architecture  —  Desire Layer</a:t>
+            </a:r>
+          </a:p>
+        </p:txBody>
+      </p:sp>
+      <p:sp>
+        <p:nvSpPr>
+          <p:cNvPr id="6" name="TextBox 5"/>
+          <p:cNvSpPr txBox="1"/>
+          <p:nvPr/>
+        </p:nvSpPr>
+        <p:spPr>
+          <a:xfrm>
+            <a:off x="300000" y="810000"/>
+            <a:ext cx="11500000" cy="320000"/>
+          </a:xfrm>
+          <a:prstGeom prst="rect">
+            <a:avLst/>
+          </a:prstGeom>
+          <a:noFill/>
+        </p:spPr>
+        <p:txBody>
+          <a:bodyPr wrap="square">
+            <a:spAutoFit/>
+          </a:bodyPr>
+          <a:lstStyle/>
+          <a:p>
+            <a:pPr algn="l"/>
+            <a:r>
+              <a:rPr b="0" i="0" sz="1100">
+                <a:solidFill>
+                  <a:srgbClr val="F4F6F9"/>
+                </a:solidFill>
+              </a:rPr>
+              <a:t>Stage IV  |  "What does the NPC want?"  |  The belief text drives the goal</a:t>
+            </a:r>
+          </a:p>
+        </p:txBody>
+      </p:sp>
+      <p:sp>
+        <p:nvSpPr>
+          <p:cNvPr id="7" name="TextBox 6"/>
+          <p:cNvSpPr txBox="1"/>
+          <p:nvPr/>
+        </p:nvSpPr>
+        <p:spPr>
+          <a:xfrm>
+            <a:off x="220000" y="1297864"/>
+            <a:ext cx="11748952" cy="260000"/>
+          </a:xfrm>
+          <a:prstGeom prst="rect">
+            <a:avLst/>
+          </a:prstGeom>
+          <a:noFill/>
+        </p:spPr>
+        <p:txBody>
+          <a:bodyPr wrap="square">
+            <a:spAutoFit/>
+          </a:bodyPr>
+          <a:lstStyle/>
+          <a:p>
+            <a:pPr algn="l"/>
+            <a:r>
+              <a:rPr b="0" i="0" sz="1200">
+                <a:solidFill>
+                  <a:srgbClr val="444455"/>
+                </a:solidFill>
+              </a:rPr>
+              <a:t>The subjective_belief text from the cognitive layer is scanned for keywords.  Keyword patterns map directly to one of four desire types.</a:t>
+            </a:r>
+          </a:p>
+        </p:txBody>
+      </p:sp>
+      <p:sp>
+        <p:nvSpPr>
+          <p:cNvPr id="8" name="Rectangle 7"/>
+          <p:cNvSpPr/>
+          <p:nvPr/>
+        </p:nvSpPr>
+        <p:spPr>
+          <a:xfrm>
+            <a:off x="220000" y="1597864"/>
+            <a:ext cx="2862238" cy="1800000"/>
+          </a:xfrm>
+          <a:prstGeom prst="rect">
+            <a:avLst/>
+          </a:prstGeom>
+          <a:solidFill>
+            <a:srgbClr val="FFFFFF"/>
+          </a:solidFill>
+          <a:ln>
+            <a:noFill/>
+          </a:ln>
+        </p:spPr>
+        <p:style>
+          <a:lnRef idx="1">
+            <a:schemeClr val="accent1"/>
+          </a:lnRef>
+          <a:fillRef idx="3">
+            <a:schemeClr val="accent1"/>
+          </a:fillRef>
+          <a:effectRef idx="2">
+            <a:schemeClr val="accent1"/>
+          </a:effectRef>
+          <a:fontRef idx="minor">
+            <a:schemeClr val="lt1"/>
+          </a:fontRef>
+        </p:style>
+        <p:txBody>
+          <a:bodyPr rtlCol="0" anchor="ctr"/>
+          <a:lstStyle/>
+          <a:p>
+            <a:pPr algn="ctr"/>
+          </a:p>
+        </p:txBody>
+      </p:sp>
+      <p:sp>
+        <p:nvSpPr>
+          <p:cNvPr id="9" name="Rectangle 8"/>
+          <p:cNvSpPr/>
+          <p:nvPr/>
+        </p:nvSpPr>
+        <p:spPr>
+          <a:xfrm>
+            <a:off x="220000" y="1597864"/>
+            <a:ext cx="2862238" cy="330000"/>
+          </a:xfrm>
+          <a:prstGeom prst="rect">
+            <a:avLst/>
+          </a:prstGeom>
+          <a:solidFill>
+            <a:srgbClr val="1E6FA8"/>
+          </a:solidFill>
+          <a:ln>
+            <a:noFill/>
+          </a:ln>
+        </p:spPr>
+        <p:style>
+          <a:lnRef idx="1">
+            <a:schemeClr val="accent1"/>
+          </a:lnRef>
+          <a:fillRef idx="3">
+            <a:schemeClr val="accent1"/>
+          </a:fillRef>
+          <a:effectRef idx="2">
+            <a:schemeClr val="accent1"/>
+          </a:effectRef>
+          <a:fontRef idx="minor">
+            <a:schemeClr val="lt1"/>
+          </a:fontRef>
+        </p:style>
+        <p:txBody>
+          <a:bodyPr rtlCol="0" anchor="ctr"/>
+          <a:lstStyle/>
+          <a:p>
+            <a:pPr algn="ctr"/>
+          </a:p>
+        </p:txBody>
+      </p:sp>
+      <p:sp>
+        <p:nvSpPr>
+          <p:cNvPr id="10" name="TextBox 9"/>
+          <p:cNvSpPr txBox="1"/>
+          <p:nvPr/>
+        </p:nvSpPr>
+        <p:spPr>
+          <a:xfrm>
+            <a:off x="290000" y="1662864"/>
+            <a:ext cx="2722238" cy="280000"/>
+          </a:xfrm>
+          <a:prstGeom prst="rect">
+            <a:avLst/>
+          </a:prstGeom>
+          <a:noFill/>
+        </p:spPr>
+        <p:txBody>
+          <a:bodyPr wrap="square">
+            <a:spAutoFit/>
+          </a:bodyPr>
+          <a:lstStyle/>
+          <a:p>
+            <a:pPr algn="l"/>
+            <a:r>
+              <a:rPr b="1" i="0" sz="1100">
+                <a:solidFill>
+                  <a:srgbClr val="FFFFFF"/>
+                </a:solidFill>
+              </a:rPr>
+              <a:t>INFORMATION-SEEKING</a:t>
+            </a:r>
+          </a:p>
+        </p:txBody>
+      </p:sp>
+      <p:sp>
+        <p:nvSpPr>
+          <p:cNvPr id="11" name="TextBox 10"/>
+          <p:cNvSpPr txBox="1"/>
+          <p:nvPr/>
+        </p:nvSpPr>
+        <p:spPr>
+          <a:xfrm>
+            <a:off x="290000" y="1987864"/>
+            <a:ext cx="2722238" cy="1370000"/>
+          </a:xfrm>
+          <a:prstGeom prst="rect">
+            <a:avLst/>
+          </a:prstGeom>
+          <a:noFill/>
+        </p:spPr>
+        <p:txBody>
+          <a:bodyPr wrap="square">
+            <a:spAutoFit/>
+          </a:bodyPr>
+          <a:lstStyle/>
+          <a:p>
+            <a:r>
+              <a:rPr b="1" sz="1000">
+                <a:solidFill>
+                  <a:srgbClr val="0D2B45"/>
+                </a:solidFill>
+              </a:rPr>
+              <a:t>Trigger keywords:</a:t>
+            </a:r>
+          </a:p>
+          <a:p>
+            <a:r>
+              <a:rPr b="0" sz="1000">
+                <a:solidFill>
+                  <a:srgbClr val="444455"/>
+                </a:solidFill>
+              </a:rPr>
+              <a:t>unclear, unsure, testing,</a:t>
+            </a:r>
+          </a:p>
+          <a:p>
+            <a:r>
+              <a:rPr b="0" sz="1000">
+                <a:solidFill>
+                  <a:srgbClr val="444455"/>
+                </a:solidFill>
+              </a:rPr>
+              <a:t>ambiguous, confused</a:t>
+            </a:r>
+          </a:p>
+          <a:p>
+            <a:r>
+              <a:rPr b="0" sz="1000">
+                <a:solidFill>
+                  <a:srgbClr val="444455"/>
+                </a:solidFill>
+              </a:rPr>
+              <a:t/>
+            </a:r>
+          </a:p>
+          <a:p>
+            <a:r>
+              <a:rPr b="1" sz="1000">
+                <a:solidFill>
+                  <a:srgbClr val="0D2B45"/>
+                </a:solidFill>
+              </a:rPr>
+              <a:t>Valence fallback:</a:t>
+            </a:r>
+          </a:p>
+          <a:p>
+            <a:r>
+              <a:rPr b="0" sz="1000">
+                <a:solidFill>
+                  <a:srgbClr val="444455"/>
+                </a:solidFill>
+              </a:rPr>
+              <a:t>valence &gt; +0.3 → this desire</a:t>
+            </a:r>
+          </a:p>
+          <a:p>
+            <a:r>
+              <a:rPr b="0" sz="1000">
+                <a:solidFill>
+                  <a:srgbClr val="444455"/>
+                </a:solidFill>
+              </a:rPr>
+              <a:t/>
+            </a:r>
+          </a:p>
+          <a:p>
+            <a:r>
+              <a:rPr b="0" sz="1000">
+                <a:solidFill>
+                  <a:srgbClr val="1E6FA8"/>
+                </a:solidFill>
+              </a:rPr>
+              <a:t>NPC wants to understand</a:t>
+            </a:r>
+          </a:p>
+          <a:p>
+            <a:r>
+              <a:rPr b="0" sz="1000">
+                <a:solidFill>
+                  <a:srgbClr val="1E6FA8"/>
+                </a:solidFill>
+              </a:rPr>
+              <a:t>what the player actually means.</a:t>
+            </a:r>
+          </a:p>
+        </p:txBody>
+      </p:sp>
+      <p:sp>
+        <p:nvSpPr>
+          <p:cNvPr id="12" name="Rectangle 11"/>
+          <p:cNvSpPr/>
+          <p:nvPr/>
+        </p:nvSpPr>
+        <p:spPr>
+          <a:xfrm>
+            <a:off x="3182238" y="1597864"/>
+            <a:ext cx="2862238" cy="1800000"/>
+          </a:xfrm>
+          <a:prstGeom prst="rect">
+            <a:avLst/>
+          </a:prstGeom>
+          <a:solidFill>
+            <a:srgbClr val="FFFFFF"/>
+          </a:solidFill>
+          <a:ln>
+            <a:noFill/>
+          </a:ln>
+        </p:spPr>
+        <p:style>
+          <a:lnRef idx="1">
+            <a:schemeClr val="accent1"/>
+          </a:lnRef>
+          <a:fillRef idx="3">
+            <a:schemeClr val="accent1"/>
+          </a:fillRef>
+          <a:effectRef idx="2">
+            <a:schemeClr val="accent1"/>
+          </a:effectRef>
+          <a:fontRef idx="minor">
+            <a:schemeClr val="lt1"/>
+          </a:fontRef>
+        </p:style>
+        <p:txBody>
+          <a:bodyPr rtlCol="0" anchor="ctr"/>
+          <a:lstStyle/>
+          <a:p>
+            <a:pPr algn="ctr"/>
+          </a:p>
+        </p:txBody>
+      </p:sp>
+      <p:sp>
+        <p:nvSpPr>
+          <p:cNvPr id="13" name="Rectangle 12"/>
+          <p:cNvSpPr/>
+          <p:nvPr/>
+        </p:nvSpPr>
+        <p:spPr>
+          <a:xfrm>
+            <a:off x="3182238" y="1597864"/>
+            <a:ext cx="2862238" cy="330000"/>
+          </a:xfrm>
+          <a:prstGeom prst="rect">
+            <a:avLst/>
+          </a:prstGeom>
+          <a:solidFill>
+            <a:srgbClr val="2EA05A"/>
+          </a:solidFill>
+          <a:ln>
+            <a:noFill/>
+          </a:ln>
+        </p:spPr>
+        <p:style>
+          <a:lnRef idx="1">
+            <a:schemeClr val="accent1"/>
+          </a:lnRef>
+          <a:fillRef idx="3">
+            <a:schemeClr val="accent1"/>
+          </a:fillRef>
+          <a:effectRef idx="2">
+            <a:schemeClr val="accent1"/>
+          </a:effectRef>
+          <a:fontRef idx="minor">
+            <a:schemeClr val="lt1"/>
+          </a:fontRef>
+        </p:style>
+        <p:txBody>
+          <a:bodyPr rtlCol="0" anchor="ctr"/>
+          <a:lstStyle/>
+          <a:p>
+            <a:pPr algn="ctr"/>
+          </a:p>
+        </p:txBody>
+      </p:sp>
+      <p:sp>
+        <p:nvSpPr>
+          <p:cNvPr id="14" name="TextBox 13"/>
+          <p:cNvSpPr txBox="1"/>
+          <p:nvPr/>
+        </p:nvSpPr>
+        <p:spPr>
+          <a:xfrm>
+            <a:off x="3252238" y="1662864"/>
+            <a:ext cx="2722238" cy="280000"/>
+          </a:xfrm>
+          <a:prstGeom prst="rect">
+            <a:avLst/>
+          </a:prstGeom>
+          <a:noFill/>
+        </p:spPr>
+        <p:txBody>
+          <a:bodyPr wrap="square">
+            <a:spAutoFit/>
+          </a:bodyPr>
+          <a:lstStyle/>
+          <a:p>
+            <a:pPr algn="l"/>
+            <a:r>
+              <a:rPr b="1" i="0" sz="1100">
+                <a:solidFill>
+                  <a:srgbClr val="FFFFFF"/>
+                </a:solidFill>
+              </a:rPr>
+              <a:t>AFFILIATION</a:t>
+            </a:r>
+          </a:p>
+        </p:txBody>
+      </p:sp>
+      <p:sp>
+        <p:nvSpPr>
+          <p:cNvPr id="15" name="TextBox 14"/>
+          <p:cNvSpPr txBox="1"/>
+          <p:nvPr/>
+        </p:nvSpPr>
+        <p:spPr>
+          <a:xfrm>
+            <a:off x="3252238" y="1987864"/>
+            <a:ext cx="2722238" cy="1370000"/>
+          </a:xfrm>
+          <a:prstGeom prst="rect">
+            <a:avLst/>
+          </a:prstGeom>
+          <a:noFill/>
+        </p:spPr>
+        <p:txBody>
+          <a:bodyPr wrap="square">
+            <a:spAutoFit/>
+          </a:bodyPr>
+          <a:lstStyle/>
+          <a:p>
+            <a:r>
+              <a:rPr b="1" sz="1000">
+                <a:solidFill>
+                  <a:srgbClr val="0D2B45"/>
+                </a:solidFill>
+              </a:rPr>
+              <a:t>Trigger keywords:</a:t>
+            </a:r>
+          </a:p>
+          <a:p>
+            <a:r>
+              <a:rPr b="0" sz="1000">
+                <a:solidFill>
+                  <a:srgbClr val="444455"/>
+                </a:solidFill>
+              </a:rPr>
+              <a:t>genuine, sincere, authentic,</a:t>
+            </a:r>
+          </a:p>
+          <a:p>
+            <a:r>
+              <a:rPr b="0" sz="1000">
+                <a:solidFill>
+                  <a:srgbClr val="444455"/>
+                </a:solidFill>
+              </a:rPr>
+              <a:t>honest, trust</a:t>
+            </a:r>
+          </a:p>
+          <a:p>
+            <a:r>
+              <a:rPr b="0" sz="1000">
+                <a:solidFill>
+                  <a:srgbClr val="444455"/>
+                </a:solidFill>
+              </a:rPr>
+              <a:t/>
+            </a:r>
+          </a:p>
+          <a:p>
+            <a:r>
+              <a:rPr b="1" sz="1000">
+                <a:solidFill>
+                  <a:srgbClr val="0D2B45"/>
+                </a:solidFill>
+              </a:rPr>
+              <a:t>Valence fallback:</a:t>
+            </a:r>
+          </a:p>
+          <a:p>
+            <a:r>
+              <a:rPr b="0" sz="1000">
+                <a:solidFill>
+                  <a:srgbClr val="444455"/>
+                </a:solidFill>
+              </a:rPr>
+              <a:t>valence &gt; +0.3 (if no keyword)</a:t>
+            </a:r>
+          </a:p>
+          <a:p>
+            <a:r>
+              <a:rPr b="0" sz="1000">
+                <a:solidFill>
+                  <a:srgbClr val="444455"/>
+                </a:solidFill>
+              </a:rPr>
+              <a:t/>
+            </a:r>
+          </a:p>
+          <a:p>
+            <a:r>
+              <a:rPr b="0" sz="1000">
+                <a:solidFill>
+                  <a:srgbClr val="2EA05A"/>
+                </a:solidFill>
+              </a:rPr>
+              <a:t>NPC wants connection,</a:t>
+            </a:r>
+          </a:p>
+          <a:p>
+            <a:r>
+              <a:rPr b="0" sz="1000">
+                <a:solidFill>
+                  <a:srgbClr val="2EA05A"/>
+                </a:solidFill>
+              </a:rPr>
+              <a:t>agreement, or rapport.</a:t>
+            </a:r>
+          </a:p>
+        </p:txBody>
+      </p:sp>
+      <p:sp>
+        <p:nvSpPr>
+          <p:cNvPr id="16" name="Rectangle 15"/>
+          <p:cNvSpPr/>
+          <p:nvPr/>
+        </p:nvSpPr>
+        <p:spPr>
+          <a:xfrm>
+            <a:off x="6144476" y="1597864"/>
+            <a:ext cx="2862238" cy="1800000"/>
+          </a:xfrm>
+          <a:prstGeom prst="rect">
+            <a:avLst/>
+          </a:prstGeom>
+          <a:solidFill>
+            <a:srgbClr val="FFFFFF"/>
+          </a:solidFill>
+          <a:ln>
+            <a:noFill/>
+          </a:ln>
+        </p:spPr>
+        <p:style>
+          <a:lnRef idx="1">
+            <a:schemeClr val="accent1"/>
+          </a:lnRef>
+          <a:fillRef idx="3">
+            <a:schemeClr val="accent1"/>
+          </a:fillRef>
+          <a:effectRef idx="2">
+            <a:schemeClr val="accent1"/>
+          </a:effectRef>
+          <a:fontRef idx="minor">
+            <a:schemeClr val="lt1"/>
+          </a:fontRef>
+        </p:style>
+        <p:txBody>
+          <a:bodyPr rtlCol="0" anchor="ctr"/>
+          <a:lstStyle/>
+          <a:p>
+            <a:pPr algn="ctr"/>
+          </a:p>
+        </p:txBody>
+      </p:sp>
+      <p:sp>
+        <p:nvSpPr>
+          <p:cNvPr id="17" name="Rectangle 16"/>
+          <p:cNvSpPr/>
+          <p:nvPr/>
+        </p:nvSpPr>
+        <p:spPr>
+          <a:xfrm>
+            <a:off x="6144476" y="1597864"/>
+            <a:ext cx="2862238" cy="330000"/>
+          </a:xfrm>
+          <a:prstGeom prst="rect">
+            <a:avLst/>
+          </a:prstGeom>
+          <a:solidFill>
+            <a:srgbClr val="C03A3A"/>
+          </a:solidFill>
+          <a:ln>
+            <a:noFill/>
+          </a:ln>
+        </p:spPr>
+        <p:style>
+          <a:lnRef idx="1">
+            <a:schemeClr val="accent1"/>
+          </a:lnRef>
+          <a:fillRef idx="3">
+            <a:schemeClr val="accent1"/>
+          </a:fillRef>
+          <a:effectRef idx="2">
+            <a:schemeClr val="accent1"/>
+          </a:effectRef>
+          <a:fontRef idx="minor">
+            <a:schemeClr val="lt1"/>
+          </a:fontRef>
+        </p:style>
+        <p:txBody>
+          <a:bodyPr rtlCol="0" anchor="ctr"/>
+          <a:lstStyle/>
+          <a:p>
+            <a:pPr algn="ctr"/>
+          </a:p>
+        </p:txBody>
+      </p:sp>
+      <p:sp>
+        <p:nvSpPr>
+          <p:cNvPr id="18" name="TextBox 17"/>
+          <p:cNvSpPr txBox="1"/>
+          <p:nvPr/>
+        </p:nvSpPr>
+        <p:spPr>
+          <a:xfrm>
+            <a:off x="6214476" y="1662864"/>
+            <a:ext cx="2722238" cy="280000"/>
+          </a:xfrm>
+          <a:prstGeom prst="rect">
+            <a:avLst/>
+          </a:prstGeom>
+          <a:noFill/>
+        </p:spPr>
+        <p:txBody>
+          <a:bodyPr wrap="square">
+            <a:spAutoFit/>
+          </a:bodyPr>
+          <a:lstStyle/>
+          <a:p>
+            <a:pPr algn="l"/>
+            <a:r>
+              <a:rPr b="1" i="0" sz="1100">
+                <a:solidFill>
+                  <a:srgbClr val="FFFFFF"/>
+                </a:solidFill>
+              </a:rPr>
+              <a:t>PROTECTION</a:t>
+            </a:r>
+          </a:p>
+        </p:txBody>
+      </p:sp>
+      <p:sp>
+        <p:nvSpPr>
+          <p:cNvPr id="19" name="TextBox 18"/>
+          <p:cNvSpPr txBox="1"/>
+          <p:nvPr/>
+        </p:nvSpPr>
+        <p:spPr>
+          <a:xfrm>
+            <a:off x="6214476" y="1987864"/>
+            <a:ext cx="2722238" cy="1370000"/>
+          </a:xfrm>
+          <a:prstGeom prst="rect">
+            <a:avLst/>
+          </a:prstGeom>
+          <a:noFill/>
+        </p:spPr>
+        <p:txBody>
+          <a:bodyPr wrap="square">
+            <a:spAutoFit/>
+          </a:bodyPr>
+          <a:lstStyle/>
+          <a:p>
+            <a:r>
+              <a:rPr b="1" sz="1000">
+                <a:solidFill>
+                  <a:srgbClr val="0D2B45"/>
+                </a:solidFill>
+              </a:rPr>
+              <a:t>Trigger keywords:</a:t>
+            </a:r>
+          </a:p>
+          <a:p>
+            <a:r>
+              <a:rPr b="0" sz="1000">
+                <a:solidFill>
+                  <a:srgbClr val="444455"/>
+                </a:solidFill>
+              </a:rPr>
+              <a:t>manipulative, threat, deceive,</a:t>
+            </a:r>
+          </a:p>
+          <a:p>
+            <a:r>
+              <a:rPr b="0" sz="1000">
+                <a:solidFill>
+                  <a:srgbClr val="444455"/>
+                </a:solidFill>
+              </a:rPr>
+              <a:t>danger, hostile</a:t>
+            </a:r>
+          </a:p>
+          <a:p>
+            <a:r>
+              <a:rPr b="0" sz="1000">
+                <a:solidFill>
+                  <a:srgbClr val="444455"/>
+                </a:solidFill>
+              </a:rPr>
+              <a:t/>
+            </a:r>
+          </a:p>
+          <a:p>
+            <a:r>
+              <a:rPr b="1" sz="1000">
+                <a:solidFill>
+                  <a:srgbClr val="0D2B45"/>
+                </a:solidFill>
+              </a:rPr>
+              <a:t>Valence fallback:</a:t>
+            </a:r>
+          </a:p>
+          <a:p>
+            <a:r>
+              <a:rPr b="0" sz="1000">
+                <a:solidFill>
+                  <a:srgbClr val="444455"/>
+                </a:solidFill>
+              </a:rPr>
+              <a:t>valence &lt; −0.3 → this desire</a:t>
+            </a:r>
+          </a:p>
+          <a:p>
+            <a:r>
+              <a:rPr b="0" sz="1000">
+                <a:solidFill>
+                  <a:srgbClr val="444455"/>
+                </a:solidFill>
+              </a:rPr>
+              <a:t/>
+            </a:r>
+          </a:p>
+          <a:p>
+            <a:r>
+              <a:rPr b="0" sz="1000">
+                <a:solidFill>
+                  <a:srgbClr val="C03A3A"/>
+                </a:solidFill>
+              </a:rPr>
+              <a:t>NPC wants to defend,</a:t>
+            </a:r>
+          </a:p>
+          <a:p>
+            <a:r>
+              <a:rPr b="0" sz="1000">
+                <a:solidFill>
+                  <a:srgbClr val="C03A3A"/>
+                </a:solidFill>
+              </a:rPr>
+              <a:t>resist, or push back.</a:t>
+            </a:r>
+          </a:p>
+        </p:txBody>
+      </p:sp>
+      <p:sp>
+        <p:nvSpPr>
+          <p:cNvPr id="20" name="Rectangle 19"/>
+          <p:cNvSpPr/>
+          <p:nvPr/>
+        </p:nvSpPr>
+        <p:spPr>
+          <a:xfrm>
+            <a:off x="9106714" y="1597864"/>
+            <a:ext cx="2862238" cy="1800000"/>
+          </a:xfrm>
+          <a:prstGeom prst="rect">
+            <a:avLst/>
+          </a:prstGeom>
+          <a:solidFill>
+            <a:srgbClr val="FFFFFF"/>
+          </a:solidFill>
+          <a:ln>
+            <a:noFill/>
+          </a:ln>
+        </p:spPr>
+        <p:style>
+          <a:lnRef idx="1">
+            <a:schemeClr val="accent1"/>
+          </a:lnRef>
+          <a:fillRef idx="3">
+            <a:schemeClr val="accent1"/>
+          </a:fillRef>
+          <a:effectRef idx="2">
+            <a:schemeClr val="accent1"/>
+          </a:effectRef>
+          <a:fontRef idx="minor">
+            <a:schemeClr val="lt1"/>
+          </a:fontRef>
+        </p:style>
+        <p:txBody>
+          <a:bodyPr rtlCol="0" anchor="ctr"/>
+          <a:lstStyle/>
+          <a:p>
+            <a:pPr algn="ctr"/>
+          </a:p>
+        </p:txBody>
+      </p:sp>
+      <p:sp>
+        <p:nvSpPr>
+          <p:cNvPr id="21" name="Rectangle 20"/>
+          <p:cNvSpPr/>
+          <p:nvPr/>
+        </p:nvSpPr>
+        <p:spPr>
+          <a:xfrm>
+            <a:off x="9106714" y="1597864"/>
+            <a:ext cx="2862238" cy="330000"/>
+          </a:xfrm>
+          <a:prstGeom prst="rect">
+            <a:avLst/>
+          </a:prstGeom>
+          <a:solidFill>
+            <a:srgbClr val="E88A1A"/>
+          </a:solidFill>
+          <a:ln>
+            <a:noFill/>
+          </a:ln>
+        </p:spPr>
+        <p:style>
+          <a:lnRef idx="1">
+            <a:schemeClr val="accent1"/>
+          </a:lnRef>
+          <a:fillRef idx="3">
+            <a:schemeClr val="accent1"/>
+          </a:fillRef>
+          <a:effectRef idx="2">
+            <a:schemeClr val="accent1"/>
+          </a:effectRef>
+          <a:fontRef idx="minor">
+            <a:schemeClr val="lt1"/>
+          </a:fontRef>
+        </p:style>
+        <p:txBody>
+          <a:bodyPr rtlCol="0" anchor="ctr"/>
+          <a:lstStyle/>
+          <a:p>
+            <a:pPr algn="ctr"/>
+          </a:p>
+        </p:txBody>
+      </p:sp>
+      <p:sp>
+        <p:nvSpPr>
+          <p:cNvPr id="22" name="TextBox 21"/>
+          <p:cNvSpPr txBox="1"/>
+          <p:nvPr/>
+        </p:nvSpPr>
+        <p:spPr>
+          <a:xfrm>
+            <a:off x="9176714" y="1662864"/>
+            <a:ext cx="2722238" cy="280000"/>
+          </a:xfrm>
+          <a:prstGeom prst="rect">
+            <a:avLst/>
+          </a:prstGeom>
+          <a:noFill/>
+        </p:spPr>
+        <p:txBody>
+          <a:bodyPr wrap="square">
+            <a:spAutoFit/>
+          </a:bodyPr>
+          <a:lstStyle/>
+          <a:p>
+            <a:pPr algn="l"/>
+            <a:r>
+              <a:rPr b="1" i="0" sz="1100">
+                <a:solidFill>
+                  <a:srgbClr val="FFFFFF"/>
+                </a:solidFill>
+              </a:rPr>
+              <a:t>DOMINANCE</a:t>
+            </a:r>
+          </a:p>
+        </p:txBody>
+      </p:sp>
+      <p:sp>
+        <p:nvSpPr>
+          <p:cNvPr id="23" name="TextBox 22"/>
+          <p:cNvSpPr txBox="1"/>
+          <p:nvPr/>
+        </p:nvSpPr>
+        <p:spPr>
+          <a:xfrm>
+            <a:off x="9176714" y="1987864"/>
+            <a:ext cx="2722238" cy="1370000"/>
+          </a:xfrm>
+          <a:prstGeom prst="rect">
+            <a:avLst/>
+          </a:prstGeom>
+          <a:noFill/>
+        </p:spPr>
+        <p:txBody>
+          <a:bodyPr wrap="square">
+            <a:spAutoFit/>
+          </a:bodyPr>
+          <a:lstStyle/>
+          <a:p>
+            <a:r>
+              <a:rPr b="1" sz="1000">
+                <a:solidFill>
+                  <a:srgbClr val="0D2B45"/>
+                </a:solidFill>
+              </a:rPr>
+              <a:t>Trigger keywords:</a:t>
+            </a:r>
+          </a:p>
+          <a:p>
+            <a:r>
+              <a:rPr b="0" sz="1000">
+                <a:solidFill>
+                  <a:srgbClr val="444455"/>
+                </a:solidFill>
+              </a:rPr>
+              <a:t>opportunistic, exploit, force,</a:t>
+            </a:r>
+          </a:p>
+          <a:p>
+            <a:r>
+              <a:rPr b="0" sz="1000">
+                <a:solidFill>
+                  <a:srgbClr val="444455"/>
+                </a:solidFill>
+              </a:rPr>
+              <a:t>control, power</a:t>
+            </a:r>
+          </a:p>
+          <a:p>
+            <a:r>
+              <a:rPr b="0" sz="1000">
+                <a:solidFill>
+                  <a:srgbClr val="444455"/>
+                </a:solidFill>
+              </a:rPr>
+              <a:t/>
+            </a:r>
+          </a:p>
+          <a:p>
+            <a:r>
+              <a:rPr b="1" sz="1000">
+                <a:solidFill>
+                  <a:srgbClr val="0D2B45"/>
+                </a:solidFill>
+              </a:rPr>
+              <a:t>Also: ideological clash</a:t>
+            </a:r>
+          </a:p>
+          <a:p>
+            <a:r>
+              <a:rPr b="0" sz="1000">
+                <a:solidFill>
+                  <a:srgbClr val="444455"/>
+                </a:solidFill>
+              </a:rPr>
+              <a:t>when ideology_alignment fires</a:t>
+            </a:r>
+          </a:p>
+          <a:p>
+            <a:r>
+              <a:rPr b="0" sz="1000">
+                <a:solidFill>
+                  <a:srgbClr val="444455"/>
+                </a:solidFill>
+              </a:rPr>
+              <a:t/>
+            </a:r>
+          </a:p>
+          <a:p>
+            <a:r>
+              <a:rPr b="0" sz="1000">
+                <a:solidFill>
+                  <a:srgbClr val="E88A1A"/>
+                </a:solidFill>
+              </a:rPr>
+              <a:t>NPC wants to assert,</a:t>
+            </a:r>
+          </a:p>
+          <a:p>
+            <a:r>
+              <a:rPr b="0" sz="1000">
+                <a:solidFill>
+                  <a:srgbClr val="E88A1A"/>
+                </a:solidFill>
+              </a:rPr>
+              <a:t>control, or challenge.</a:t>
+            </a:r>
+          </a:p>
+        </p:txBody>
+      </p:sp>
+      <p:sp>
+        <p:nvSpPr>
+          <p:cNvPr id="24" name="Rectangle 23"/>
+          <p:cNvSpPr/>
+          <p:nvPr/>
+        </p:nvSpPr>
+        <p:spPr>
+          <a:xfrm>
+            <a:off x="220000" y="3547864"/>
+            <a:ext cx="5774476" cy="3230136"/>
+          </a:xfrm>
+          <a:prstGeom prst="rect">
+            <a:avLst/>
+          </a:prstGeom>
+          <a:solidFill>
+            <a:srgbClr val="FFFFFF"/>
+          </a:solidFill>
+          <a:ln>
+            <a:noFill/>
+          </a:ln>
+        </p:spPr>
+        <p:style>
+          <a:lnRef idx="1">
+            <a:schemeClr val="accent1"/>
+          </a:lnRef>
+          <a:fillRef idx="3">
+            <a:schemeClr val="accent1"/>
+          </a:fillRef>
+          <a:effectRef idx="2">
+            <a:schemeClr val="accent1"/>
+          </a:effectRef>
+          <a:fontRef idx="minor">
+            <a:schemeClr val="lt1"/>
+          </a:fontRef>
+        </p:style>
+        <p:txBody>
+          <a:bodyPr rtlCol="0" anchor="ctr"/>
+          <a:lstStyle/>
+          <a:p>
+            <a:pPr algn="ctr"/>
+          </a:p>
+        </p:txBody>
+      </p:sp>
+      <p:sp>
+        <p:nvSpPr>
+          <p:cNvPr id="25" name="Rectangle 24"/>
+          <p:cNvSpPr/>
+          <p:nvPr/>
+        </p:nvSpPr>
+        <p:spPr>
+          <a:xfrm>
+            <a:off x="220000" y="3547864"/>
+            <a:ext cx="5774476" cy="330000"/>
+          </a:xfrm>
+          <a:prstGeom prst="rect">
+            <a:avLst/>
+          </a:prstGeom>
+          <a:solidFill>
+            <a:srgbClr val="0D2B45"/>
+          </a:solidFill>
+          <a:ln>
+            <a:noFill/>
+          </a:ln>
+        </p:spPr>
+        <p:style>
+          <a:lnRef idx="1">
+            <a:schemeClr val="accent1"/>
+          </a:lnRef>
+          <a:fillRef idx="3">
+            <a:schemeClr val="accent1"/>
+          </a:fillRef>
+          <a:effectRef idx="2">
+            <a:schemeClr val="accent1"/>
+          </a:effectRef>
+          <a:fontRef idx="minor">
+            <a:schemeClr val="lt1"/>
+          </a:fontRef>
+        </p:style>
+        <p:txBody>
+          <a:bodyPr rtlCol="0" anchor="ctr"/>
+          <a:lstStyle/>
+          <a:p>
+            <a:pPr algn="ctr"/>
+          </a:p>
+        </p:txBody>
+      </p:sp>
+      <p:sp>
+        <p:nvSpPr>
+          <p:cNvPr id="26" name="TextBox 25"/>
+          <p:cNvSpPr txBox="1"/>
+          <p:nvPr/>
+        </p:nvSpPr>
+        <p:spPr>
+          <a:xfrm>
+            <a:off x="290000" y="3612864"/>
+            <a:ext cx="5634476" cy="280000"/>
+          </a:xfrm>
+          <a:prstGeom prst="rect">
+            <a:avLst/>
+          </a:prstGeom>
+          <a:noFill/>
+        </p:spPr>
+        <p:txBody>
+          <a:bodyPr wrap="square">
+            <a:spAutoFit/>
+          </a:bodyPr>
+          <a:lstStyle/>
+          <a:p>
+            <a:pPr algn="l"/>
+            <a:r>
+              <a:rPr b="1" i="0" sz="1100">
+                <a:solidFill>
+                  <a:srgbClr val="FFFFFF"/>
+                </a:solidFill>
+              </a:rPr>
+              <a:t>Bias Modifier — personality adjusts the desire</a:t>
+            </a:r>
+          </a:p>
+        </p:txBody>
+      </p:sp>
+      <p:sp>
+        <p:nvSpPr>
+          <p:cNvPr id="27" name="TextBox 26"/>
+          <p:cNvSpPr txBox="1"/>
+          <p:nvPr/>
+        </p:nvSpPr>
+        <p:spPr>
+          <a:xfrm>
+            <a:off x="290000" y="3937864"/>
+            <a:ext cx="5634476" cy="2800136"/>
+          </a:xfrm>
+          <a:prstGeom prst="rect">
+            <a:avLst/>
+          </a:prstGeom>
+          <a:noFill/>
+        </p:spPr>
+        <p:txBody>
+          <a:bodyPr wrap="square">
+            <a:spAutoFit/>
+          </a:bodyPr>
+          <a:lstStyle/>
+          <a:p>
+            <a:r>
+              <a:rPr b="0" sz="1100">
+                <a:solidFill>
+                  <a:srgbClr val="444455"/>
+                </a:solidFill>
+              </a:rPr>
+              <a:t>After keyword patterns resolve, the cognitive_bias type</a:t>
+            </a:r>
+          </a:p>
+          <a:p>
+            <a:r>
+              <a:rPr b="0" sz="1100">
+                <a:solidFill>
+                  <a:srgbClr val="444455"/>
+                </a:solidFill>
+              </a:rPr>
+              <a:t>applies an intensity multiplier to the matching desire.</a:t>
+            </a:r>
+          </a:p>
+          <a:p>
+            <a:r>
+              <a:rPr b="0" sz="1100">
+                <a:solidFill>
+                  <a:srgbClr val="444455"/>
+                </a:solidFill>
+              </a:rPr>
+              <a:t/>
+            </a:r>
+          </a:p>
+          <a:p>
+            <a:r>
+              <a:rPr b="0" sz="1100">
+                <a:solidFill>
+                  <a:srgbClr val="444455"/>
+                </a:solidFill>
+              </a:rPr>
+              <a:t>e.g.  black_white_thinking  → boosts DOMINANCE or PROTECTION</a:t>
+            </a:r>
+          </a:p>
+          <a:p>
+            <a:r>
+              <a:rPr b="0" sz="1100">
+                <a:solidFill>
+                  <a:srgbClr val="444455"/>
+                </a:solidFill>
+              </a:rPr>
+              <a:t>e.g.  confirmation_bias      → boosts AFFILIATION</a:t>
+            </a:r>
+          </a:p>
+          <a:p>
+            <a:r>
+              <a:rPr b="0" sz="1100">
+                <a:solidFill>
+                  <a:srgbClr val="444455"/>
+                </a:solidFill>
+              </a:rPr>
+              <a:t>e.g.  ideological_filter     → boosts PROTECTION (challenge) or AFFILIATION (agree)</a:t>
+            </a:r>
+          </a:p>
+          <a:p>
+            <a:r>
+              <a:rPr b="0" sz="1100">
+                <a:solidFill>
+                  <a:srgbClr val="444455"/>
+                </a:solidFill>
+              </a:rPr>
+              <a:t/>
+            </a:r>
+          </a:p>
+          <a:p>
+            <a:r>
+              <a:rPr b="1" sz="1100">
+                <a:solidFill>
+                  <a:srgbClr val="1E6FA8"/>
+                </a:solidFill>
+              </a:rPr>
+              <a:t>The bias is set by the cognitive layer — this is how the two stages chain together.</a:t>
+            </a:r>
+          </a:p>
+        </p:txBody>
+      </p:sp>
+      <p:sp>
+        <p:nvSpPr>
+          <p:cNvPr id="28" name="Rectangle 27"/>
+          <p:cNvSpPr/>
+          <p:nvPr/>
+        </p:nvSpPr>
+        <p:spPr>
+          <a:xfrm>
+            <a:off x="6194476" y="3547864"/>
+            <a:ext cx="5774476" cy="3230136"/>
+          </a:xfrm>
+          <a:prstGeom prst="rect">
+            <a:avLst/>
+          </a:prstGeom>
+          <a:solidFill>
+            <a:srgbClr val="FFFFFF"/>
+          </a:solidFill>
+          <a:ln>
+            <a:noFill/>
+          </a:ln>
+        </p:spPr>
+        <p:style>
+          <a:lnRef idx="1">
+            <a:schemeClr val="accent1"/>
+          </a:lnRef>
+          <a:fillRef idx="3">
+            <a:schemeClr val="accent1"/>
+          </a:fillRef>
+          <a:effectRef idx="2">
+            <a:schemeClr val="accent1"/>
+          </a:effectRef>
+          <a:fontRef idx="minor">
+            <a:schemeClr val="lt1"/>
+          </a:fontRef>
+        </p:style>
+        <p:txBody>
+          <a:bodyPr rtlCol="0" anchor="ctr"/>
+          <a:lstStyle/>
+          <a:p>
+            <a:pPr algn="ctr"/>
+          </a:p>
+        </p:txBody>
+      </p:sp>
+      <p:sp>
+        <p:nvSpPr>
+          <p:cNvPr id="29" name="Rectangle 28"/>
+          <p:cNvSpPr/>
+          <p:nvPr/>
+        </p:nvSpPr>
+        <p:spPr>
+          <a:xfrm>
+            <a:off x="6194476" y="3547864"/>
+            <a:ext cx="5774476" cy="330000"/>
+          </a:xfrm>
+          <a:prstGeom prst="rect">
+            <a:avLst/>
+          </a:prstGeom>
+          <a:solidFill>
+            <a:srgbClr val="0D2B45"/>
+          </a:solidFill>
+          <a:ln>
+            <a:noFill/>
+          </a:ln>
+        </p:spPr>
+        <p:style>
+          <a:lnRef idx="1">
+            <a:schemeClr val="accent1"/>
+          </a:lnRef>
+          <a:fillRef idx="3">
+            <a:schemeClr val="accent1"/>
+          </a:fillRef>
+          <a:effectRef idx="2">
+            <a:schemeClr val="accent1"/>
+          </a:effectRef>
+          <a:fontRef idx="minor">
+            <a:schemeClr val="lt1"/>
+          </a:fontRef>
+        </p:style>
+        <p:txBody>
+          <a:bodyPr rtlCol="0" anchor="ctr"/>
+          <a:lstStyle/>
+          <a:p>
+            <a:pPr algn="ctr"/>
+          </a:p>
+        </p:txBody>
+      </p:sp>
+      <p:sp>
+        <p:nvSpPr>
+          <p:cNvPr id="30" name="TextBox 29"/>
+          <p:cNvSpPr txBox="1"/>
+          <p:nvPr/>
+        </p:nvSpPr>
+        <p:spPr>
+          <a:xfrm>
+            <a:off x="6264476" y="3612864"/>
+            <a:ext cx="5634476" cy="280000"/>
+          </a:xfrm>
+          <a:prstGeom prst="rect">
+            <a:avLst/>
+          </a:prstGeom>
+          <a:noFill/>
+        </p:spPr>
+        <p:txBody>
+          <a:bodyPr wrap="square">
+            <a:spAutoFit/>
+          </a:bodyPr>
+          <a:lstStyle/>
+          <a:p>
+            <a:pPr algn="l"/>
+            <a:r>
+              <a:rPr b="1" i="0" sz="1100">
+                <a:solidFill>
+                  <a:srgbClr val="FFFFFF"/>
+                </a:solidFill>
+              </a:rPr>
+              <a:t>Wildcard Override + Memory Hook</a:t>
+            </a:r>
+          </a:p>
+        </p:txBody>
+      </p:sp>
+      <p:sp>
+        <p:nvSpPr>
+          <p:cNvPr id="31" name="TextBox 30"/>
+          <p:cNvSpPr txBox="1"/>
+          <p:nvPr/>
+        </p:nvSpPr>
+        <p:spPr>
+          <a:xfrm>
+            <a:off x="6264476" y="3937864"/>
+            <a:ext cx="5634476" cy="2800136"/>
+          </a:xfrm>
+          <a:prstGeom prst="rect">
+            <a:avLst/>
+          </a:prstGeom>
+          <a:noFill/>
+        </p:spPr>
+        <p:txBody>
+          <a:bodyPr wrap="square">
+            <a:spAutoFit/>
+          </a:bodyPr>
+          <a:lstStyle/>
+          <a:p>
+            <a:r>
+              <a:rPr b="0" sz="1100">
+                <a:solidFill>
+                  <a:srgbClr val="444455"/>
+                </a:solidFill>
+              </a:rPr>
+              <a:t>Each NPC can have a wildcard personality trait.</a:t>
+            </a:r>
+          </a:p>
+          <a:p>
+            <a:r>
+              <a:rPr b="0" sz="1100">
+                <a:solidFill>
+                  <a:srgbClr val="444455"/>
+                </a:solidFill>
+              </a:rPr>
+              <a:t>Under extreme conditions it bypasses all keyword logic:</a:t>
+            </a:r>
+          </a:p>
+          <a:p>
+            <a:r>
+              <a:rPr b="0" sz="1100">
+                <a:solidFill>
+                  <a:srgbClr val="444455"/>
+                </a:solidFill>
+              </a:rPr>
+              <a:t/>
+            </a:r>
+          </a:p>
+          <a:p>
+            <a:r>
+              <a:rPr b="1" sz="1100">
+                <a:solidFill>
+                  <a:srgbClr val="C03A3A"/>
+                </a:solidFill>
+              </a:rPr>
+              <a:t>Moses — Martyr wildcard:</a:t>
+            </a:r>
+          </a:p>
+          <a:p>
+            <a:r>
+              <a:rPr b="0" sz="1100">
+                <a:solidFill>
+                  <a:srgbClr val="444455"/>
+                </a:solidFill>
+              </a:rPr>
+              <a:t>  ideological pressure → hard-select PROTECTION at 0.978 confrontation</a:t>
+            </a:r>
+          </a:p>
+          <a:p>
+            <a:r>
+              <a:rPr b="1" sz="1100">
+                <a:solidFill>
+                  <a:srgbClr val="1E6FA8"/>
+                </a:solidFill>
+              </a:rPr>
+              <a:t>Krakk — Inferiority wildcard:</a:t>
+            </a:r>
+          </a:p>
+          <a:p>
+            <a:r>
+              <a:rPr b="0" sz="1100">
+                <a:solidFill>
+                  <a:srgbClr val="444455"/>
+                </a:solidFill>
+              </a:rPr>
+              <a:t>  sensitivity to dismissive tone</a:t>
+            </a:r>
+          </a:p>
+          <a:p>
+            <a:r>
+              <a:rPr b="0" sz="1100">
+                <a:solidFill>
+                  <a:srgbClr val="444455"/>
+                </a:solidFill>
+              </a:rPr>
+              <a:t/>
+            </a:r>
+          </a:p>
+          <a:p>
+            <a:r>
+              <a:rPr b="1" sz="1100">
+                <a:solidFill>
+                  <a:srgbClr val="0D2B45"/>
+                </a:solidFill>
+              </a:rPr>
+              <a:t>Memory Hook:  I · A · P · D</a:t>
+            </a:r>
+          </a:p>
+          <a:p>
+            <a:r>
+              <a:rPr b="1" sz="1100">
+                <a:solidFill>
+                  <a:srgbClr val="2AB4C4"/>
+                </a:solidFill>
+              </a:rPr>
+              <a:t>"Info / Affiliate / Protect / Dominate — the belief picks the goal."</a:t>
+            </a:r>
+          </a:p>
+        </p:txBody>
+      </p:sp>
+    </p:spTree>
+  </p:cSld>
+  <p:clrMapOvr>
+    <a:masterClrMapping/>
+  </p:clrMapOvr>
+</p:sld>
+</file>
+
+<file path=ppt/slides/slide13.xml><?xml version="1.0" encoding="utf-8"?>
+<p:sld xmlns:a="http://schemas.openxmlformats.org/drawingml/2006/main" xmlns:p="http://schemas.openxmlformats.org/presentationml/2006/main" xmlns:r="http://schemas.openxmlformats.org/officeDocument/2006/relationships">
+  <p:cSld>
+    <p:spTree>
+      <p:nvGrpSpPr>
+        <p:cNvPr id="1" name=""/>
+        <p:cNvGrpSpPr/>
+        <p:nvPr/>
+      </p:nvGrpSpPr>
+      <p:grpSpPr/>
+      <p:sp>
+        <p:nvSpPr>
+          <p:cNvPr id="2" name="Rectangle 1"/>
+          <p:cNvSpPr/>
+          <p:nvPr/>
+        </p:nvSpPr>
+        <p:spPr>
+          <a:xfrm>
+            <a:off x="0" y="0"/>
+            <a:ext cx="12188952" cy="1143000"/>
+          </a:xfrm>
+          <a:prstGeom prst="rect">
+            <a:avLst/>
+          </a:prstGeom>
+          <a:solidFill>
+            <a:srgbClr val="0D2B45"/>
+          </a:solidFill>
+          <a:ln>
+            <a:noFill/>
+          </a:ln>
+        </p:spPr>
+        <p:style>
+          <a:lnRef idx="1">
+            <a:schemeClr val="accent1"/>
+          </a:lnRef>
+          <a:fillRef idx="3">
+            <a:schemeClr val="accent1"/>
+          </a:fillRef>
+          <a:effectRef idx="2">
+            <a:schemeClr val="accent1"/>
+          </a:effectRef>
+          <a:fontRef idx="minor">
+            <a:schemeClr val="lt1"/>
+          </a:fontRef>
+        </p:style>
+        <p:txBody>
+          <a:bodyPr rtlCol="0" anchor="ctr"/>
+          <a:lstStyle/>
+          <a:p>
+            <a:pPr algn="ctr"/>
+          </a:p>
+        </p:txBody>
+      </p:sp>
+      <p:sp>
+        <p:nvSpPr>
+          <p:cNvPr id="3" name="Rectangle 2"/>
+          <p:cNvSpPr/>
+          <p:nvPr/>
+        </p:nvSpPr>
+        <p:spPr>
+          <a:xfrm>
+            <a:off x="0" y="1143000"/>
+            <a:ext cx="12188952" cy="54864"/>
+          </a:xfrm>
+          <a:prstGeom prst="rect">
+            <a:avLst/>
+          </a:prstGeom>
+          <a:solidFill>
+            <a:srgbClr val="2AB4C4"/>
+          </a:solidFill>
+          <a:ln>
+            <a:noFill/>
+          </a:ln>
+        </p:spPr>
+        <p:style>
+          <a:lnRef idx="1">
+            <a:schemeClr val="accent1"/>
+          </a:lnRef>
+          <a:fillRef idx="3">
+            <a:schemeClr val="accent1"/>
+          </a:fillRef>
+          <a:effectRef idx="2">
+            <a:schemeClr val="accent1"/>
+          </a:effectRef>
+          <a:fontRef idx="minor">
+            <a:schemeClr val="lt1"/>
+          </a:fontRef>
+        </p:style>
+        <p:txBody>
+          <a:bodyPr rtlCol="0" anchor="ctr"/>
+          <a:lstStyle/>
+          <a:p>
+            <a:pPr algn="ctr"/>
+          </a:p>
+        </p:txBody>
+      </p:sp>
+      <p:sp>
+        <p:nvSpPr>
+          <p:cNvPr id="4" name="Rectangle 3"/>
+          <p:cNvSpPr/>
+          <p:nvPr/>
+        </p:nvSpPr>
+        <p:spPr>
+          <a:xfrm>
+            <a:off x="0" y="1197864"/>
+            <a:ext cx="12188952" cy="5660136"/>
+          </a:xfrm>
+          <a:prstGeom prst="rect">
+            <a:avLst/>
+          </a:prstGeom>
+          <a:solidFill>
+            <a:srgbClr val="F4F6F9"/>
+          </a:solidFill>
+          <a:ln>
+            <a:noFill/>
+          </a:ln>
+        </p:spPr>
+        <p:style>
+          <a:lnRef idx="1">
+            <a:schemeClr val="accent1"/>
+          </a:lnRef>
+          <a:fillRef idx="3">
+            <a:schemeClr val="accent1"/>
+          </a:fillRef>
+          <a:effectRef idx="2">
+            <a:schemeClr val="accent1"/>
+          </a:effectRef>
+          <a:fontRef idx="minor">
+            <a:schemeClr val="lt1"/>
+          </a:fontRef>
+        </p:style>
+        <p:txBody>
+          <a:bodyPr rtlCol="0" anchor="ctr"/>
+          <a:lstStyle/>
+          <a:p>
+            <a:pPr algn="ctr"/>
+          </a:p>
+        </p:txBody>
+      </p:sp>
+      <p:sp>
+        <p:nvSpPr>
+          <p:cNvPr id="5" name="TextBox 4"/>
+          <p:cNvSpPr txBox="1"/>
+          <p:nvPr/>
+        </p:nvSpPr>
+        <p:spPr>
+          <a:xfrm>
+            <a:off x="300000" y="110000"/>
+            <a:ext cx="11500000" cy="750000"/>
+          </a:xfrm>
+          <a:prstGeom prst="rect">
+            <a:avLst/>
+          </a:prstGeom>
+          <a:noFill/>
+        </p:spPr>
+        <p:txBody>
+          <a:bodyPr wrap="square">
+            <a:spAutoFit/>
+          </a:bodyPr>
+          <a:lstStyle/>
+          <a:p>
+            <a:pPr algn="l"/>
+            <a:r>
+              <a:rPr b="1" i="0" sz="2800">
+                <a:solidFill>
+                  <a:srgbClr val="FFFFFF"/>
+                </a:solidFill>
+              </a:rPr>
+              <a:t>Architecture  —  Socialisation Layer  (Intention)</a:t>
+            </a:r>
+          </a:p>
+        </p:txBody>
+      </p:sp>
+      <p:sp>
+        <p:nvSpPr>
+          <p:cNvPr id="6" name="TextBox 5"/>
+          <p:cNvSpPr txBox="1"/>
+          <p:nvPr/>
+        </p:nvSpPr>
+        <p:spPr>
+          <a:xfrm>
+            <a:off x="300000" y="810000"/>
+            <a:ext cx="11500000" cy="320000"/>
+          </a:xfrm>
+          <a:prstGeom prst="rect">
+            <a:avLst/>
+          </a:prstGeom>
+          <a:noFill/>
+        </p:spPr>
+        <p:txBody>
+          <a:bodyPr wrap="square">
+            <a:spAutoFit/>
+          </a:bodyPr>
+          <a:lstStyle/>
+          <a:p>
+            <a:pPr algn="l"/>
+            <a:r>
+              <a:rPr b="0" i="0" sz="1100">
+                <a:solidFill>
+                  <a:srgbClr val="F4F6F9"/>
+                </a:solidFill>
+              </a:rPr>
+              <a:t>Stage V  |  "How does the NPC act?"  |  Desire type → 1 of 19 named intentions → LLM speaks the result</a:t>
+            </a:r>
+          </a:p>
+        </p:txBody>
+      </p:sp>
+      <p:sp>
+        <p:nvSpPr>
+          <p:cNvPr id="7" name="Rectangle 6"/>
+          <p:cNvSpPr/>
+          <p:nvPr/>
+        </p:nvSpPr>
+        <p:spPr>
+          <a:xfrm>
+            <a:off x="220000" y="1297864"/>
+            <a:ext cx="4200000" cy="2600000"/>
+          </a:xfrm>
+          <a:prstGeom prst="rect">
+            <a:avLst/>
+          </a:prstGeom>
+          <a:solidFill>
+            <a:srgbClr val="FFFFFF"/>
+          </a:solidFill>
+          <a:ln>
+            <a:noFill/>
+          </a:ln>
+        </p:spPr>
+        <p:style>
+          <a:lnRef idx="1">
+            <a:schemeClr val="accent1"/>
+          </a:lnRef>
+          <a:fillRef idx="3">
+            <a:schemeClr val="accent1"/>
+          </a:fillRef>
+          <a:effectRef idx="2">
+            <a:schemeClr val="accent1"/>
+          </a:effectRef>
+          <a:fontRef idx="minor">
+            <a:schemeClr val="lt1"/>
+          </a:fontRef>
+        </p:style>
+        <p:txBody>
+          <a:bodyPr rtlCol="0" anchor="ctr"/>
+          <a:lstStyle/>
+          <a:p>
+            <a:pPr algn="ctr"/>
+          </a:p>
+        </p:txBody>
+      </p:sp>
+      <p:sp>
+        <p:nvSpPr>
+          <p:cNvPr id="8" name="Rectangle 7"/>
+          <p:cNvSpPr/>
+          <p:nvPr/>
+        </p:nvSpPr>
+        <p:spPr>
+          <a:xfrm>
+            <a:off x="220000" y="1297864"/>
+            <a:ext cx="4200000" cy="330000"/>
+          </a:xfrm>
+          <a:prstGeom prst="rect">
+            <a:avLst/>
+          </a:prstGeom>
+          <a:solidFill>
+            <a:srgbClr val="0D2B45"/>
+          </a:solidFill>
+          <a:ln>
+            <a:noFill/>
+          </a:ln>
+        </p:spPr>
+        <p:style>
+          <a:lnRef idx="1">
+            <a:schemeClr val="accent1"/>
+          </a:lnRef>
+          <a:fillRef idx="3">
+            <a:schemeClr val="accent1"/>
+          </a:fillRef>
+          <a:effectRef idx="2">
+            <a:schemeClr val="accent1"/>
+          </a:effectRef>
+          <a:fontRef idx="minor">
+            <a:schemeClr val="lt1"/>
+          </a:fontRef>
+        </p:style>
+        <p:txBody>
+          <a:bodyPr rtlCol="0" anchor="ctr"/>
+          <a:lstStyle/>
+          <a:p>
+            <a:pPr algn="ctr"/>
+          </a:p>
+        </p:txBody>
+      </p:sp>
+      <p:sp>
+        <p:nvSpPr>
+          <p:cNvPr id="9" name="TextBox 8"/>
+          <p:cNvSpPr txBox="1"/>
+          <p:nvPr/>
+        </p:nvSpPr>
+        <p:spPr>
+          <a:xfrm>
+            <a:off x="290000" y="1362864"/>
+            <a:ext cx="4060000" cy="280000"/>
+          </a:xfrm>
+          <a:prstGeom prst="rect">
+            <a:avLst/>
+          </a:prstGeom>
+          <a:noFill/>
+        </p:spPr>
+        <p:txBody>
+          <a:bodyPr wrap="square">
+            <a:spAutoFit/>
+          </a:bodyPr>
+          <a:lstStyle/>
+          <a:p>
+            <a:pPr algn="l"/>
+            <a:r>
+              <a:rPr b="1" i="0" sz="1100">
+                <a:solidFill>
+                  <a:srgbClr val="FFFFFF"/>
+                </a:solidFill>
+              </a:rPr>
+              <a:t>INTENTION_REGISTRY — 19 canonical intentions</a:t>
+            </a:r>
+          </a:p>
+        </p:txBody>
+      </p:sp>
+      <p:sp>
+        <p:nvSpPr>
+          <p:cNvPr id="10" name="TextBox 9"/>
+          <p:cNvSpPr txBox="1"/>
+          <p:nvPr/>
+        </p:nvSpPr>
+        <p:spPr>
+          <a:xfrm>
+            <a:off x="290000" y="1687864"/>
+            <a:ext cx="4060000" cy="2170000"/>
+          </a:xfrm>
+          <a:prstGeom prst="rect">
+            <a:avLst/>
+          </a:prstGeom>
+          <a:noFill/>
+        </p:spPr>
+        <p:txBody>
+          <a:bodyPr wrap="square">
+            <a:spAutoFit/>
+          </a:bodyPr>
+          <a:lstStyle/>
+          <a:p>
+            <a:r>
+              <a:rPr b="1" sz="1100">
+                <a:solidFill>
+                  <a:srgbClr val="0D2B45"/>
+                </a:solidFill>
+              </a:rPr>
+              <a:t>Each intention template has:</a:t>
+            </a:r>
+          </a:p>
+          <a:p>
+            <a:r>
+              <a:rPr b="0" sz="1100">
+                <a:solidFill>
+                  <a:srgbClr val="444455"/>
+                </a:solidFill>
+              </a:rPr>
+              <a:t>  desire_type     — which desire this intention serves</a:t>
+            </a:r>
+          </a:p>
+          <a:p>
+            <a:r>
+              <a:rPr b="0" sz="1100">
+                <a:solidFill>
+                  <a:srgbClr val="444455"/>
+                </a:solidFill>
+              </a:rPr>
+              <a:t>  confrontation_range  — [min, max] confrontation this intention uses</a:t>
+            </a:r>
+          </a:p>
+          <a:p>
+            <a:r>
+              <a:rPr b="0" sz="1100">
+                <a:solidFill>
+                  <a:srgbClr val="444455"/>
+                </a:solidFill>
+              </a:rPr>
+              <a:t>  expression_type — calm / careful / firm / challenging / explosive</a:t>
+            </a:r>
+          </a:p>
+          <a:p>
+            <a:r>
+              <a:rPr b="0" sz="1100">
+                <a:solidFill>
+                  <a:srgbClr val="444455"/>
+                </a:solidFill>
+              </a:rPr>
+              <a:t>  dialogue_direction  — a one-line scene direction for the LLM</a:t>
+            </a:r>
+          </a:p>
+          <a:p>
+            <a:r>
+              <a:rPr b="0" sz="1100">
+                <a:solidFill>
+                  <a:srgbClr val="444455"/>
+                </a:solidFill>
+              </a:rPr>
+              <a:t/>
+            </a:r>
+          </a:p>
+          <a:p>
+            <a:r>
+              <a:rPr b="1" sz="1100">
+                <a:solidFill>
+                  <a:srgbClr val="0D2B45"/>
+                </a:solidFill>
+              </a:rPr>
+              <a:t>Selection process:</a:t>
+            </a:r>
+          </a:p>
+          <a:p>
+            <a:r>
+              <a:rPr b="0" sz="1100">
+                <a:solidFill>
+                  <a:srgbClr val="444455"/>
+                </a:solidFill>
+              </a:rPr>
+              <a:t>  1. Filter registry to templates matching the current desire_type</a:t>
+            </a:r>
+          </a:p>
+          <a:p>
+            <a:r>
+              <a:rPr b="0" sz="1100">
+                <a:solidFill>
+                  <a:srgbClr val="444455"/>
+                </a:solidFill>
+              </a:rPr>
+              <a:t>  2. Score each against NPC personality + desire intensity</a:t>
+            </a:r>
+          </a:p>
+          <a:p>
+            <a:r>
+              <a:rPr b="1" sz="1100">
+                <a:solidFill>
+                  <a:srgbClr val="1E6FA8"/>
+                </a:solidFill>
+              </a:rPr>
+              <a:t>  3. Pick best match — deterministic</a:t>
+            </a:r>
+          </a:p>
+          <a:p>
+            <a:r>
+              <a:rPr b="0" sz="1100">
+                <a:solidFill>
+                  <a:srgbClr val="444455"/>
+                </a:solidFill>
+              </a:rPr>
+              <a:t/>
+            </a:r>
+          </a:p>
+          <a:p>
+            <a:r>
+              <a:rPr b="1" sz="1100">
+                <a:solidFill>
+                  <a:srgbClr val="1E6FA8"/>
+                </a:solidFill>
+              </a:rPr>
+              <a:t>Confrontation is then CLAMPED to the NPC's natural range.</a:t>
+            </a:r>
+          </a:p>
+          <a:p>
+            <a:r>
+              <a:rPr b="0" sz="1100">
+                <a:solidFill>
+                  <a:srgbClr val="444455"/>
+                </a:solidFill>
+              </a:rPr>
+              <a:t>  Low assertion NPC → confrontation stays low even under protection desire.</a:t>
+            </a:r>
+          </a:p>
+        </p:txBody>
+      </p:sp>
+      <p:sp>
+        <p:nvSpPr>
+          <p:cNvPr id="11" name="Rectangle 10"/>
+          <p:cNvSpPr/>
+          <p:nvPr/>
+        </p:nvSpPr>
+        <p:spPr>
+          <a:xfrm>
+            <a:off x="4620000" y="1297864"/>
+            <a:ext cx="3400000" cy="760000"/>
+          </a:xfrm>
+          <a:prstGeom prst="rect">
+            <a:avLst/>
+          </a:prstGeom>
+          <a:solidFill>
+            <a:srgbClr val="FFFFFF"/>
+          </a:solidFill>
+          <a:ln>
+            <a:noFill/>
+          </a:ln>
+        </p:spPr>
+        <p:style>
+          <a:lnRef idx="1">
+            <a:schemeClr val="accent1"/>
+          </a:lnRef>
+          <a:fillRef idx="3">
+            <a:schemeClr val="accent1"/>
+          </a:fillRef>
+          <a:effectRef idx="2">
+            <a:schemeClr val="accent1"/>
+          </a:effectRef>
+          <a:fontRef idx="minor">
+            <a:schemeClr val="lt1"/>
+          </a:fontRef>
+        </p:style>
+        <p:txBody>
+          <a:bodyPr rtlCol="0" anchor="ctr"/>
+          <a:lstStyle/>
+          <a:p>
+            <a:pPr algn="ctr"/>
+          </a:p>
+        </p:txBody>
+      </p:sp>
+      <p:sp>
+        <p:nvSpPr>
+          <p:cNvPr id="12" name="Rectangle 11"/>
+          <p:cNvSpPr/>
+          <p:nvPr/>
+        </p:nvSpPr>
+        <p:spPr>
+          <a:xfrm>
+            <a:off x="4620000" y="1297864"/>
+            <a:ext cx="3400000" cy="330000"/>
+          </a:xfrm>
+          <a:prstGeom prst="rect">
+            <a:avLst/>
+          </a:prstGeom>
+          <a:solidFill>
+            <a:srgbClr val="1E6FA8"/>
+          </a:solidFill>
+          <a:ln>
+            <a:noFill/>
+          </a:ln>
+        </p:spPr>
+        <p:style>
+          <a:lnRef idx="1">
+            <a:schemeClr val="accent1"/>
+          </a:lnRef>
+          <a:fillRef idx="3">
+            <a:schemeClr val="accent1"/>
+          </a:fillRef>
+          <a:effectRef idx="2">
+            <a:schemeClr val="accent1"/>
+          </a:effectRef>
+          <a:fontRef idx="minor">
+            <a:schemeClr val="lt1"/>
+          </a:fontRef>
+        </p:style>
+        <p:txBody>
+          <a:bodyPr rtlCol="0" anchor="ctr"/>
+          <a:lstStyle/>
+          <a:p>
+            <a:pPr algn="ctr"/>
+          </a:p>
+        </p:txBody>
+      </p:sp>
+      <p:sp>
+        <p:nvSpPr>
+          <p:cNvPr id="13" name="TextBox 12"/>
+          <p:cNvSpPr txBox="1"/>
+          <p:nvPr/>
+        </p:nvSpPr>
+        <p:spPr>
+          <a:xfrm>
+            <a:off x="4690000" y="1362864"/>
+            <a:ext cx="3260000" cy="280000"/>
+          </a:xfrm>
+          <a:prstGeom prst="rect">
+            <a:avLst/>
+          </a:prstGeom>
+          <a:noFill/>
+        </p:spPr>
+        <p:txBody>
+          <a:bodyPr wrap="square">
+            <a:spAutoFit/>
+          </a:bodyPr>
+          <a:lstStyle/>
+          <a:p>
+            <a:pPr algn="l"/>
+            <a:r>
+              <a:rPr b="1" i="0" sz="1100">
+                <a:solidFill>
+                  <a:srgbClr val="FFFFFF"/>
+                </a:solidFill>
+              </a:rPr>
+              <a:t>Example: "Carefully Question Motives"</a:t>
+            </a:r>
+          </a:p>
+        </p:txBody>
+      </p:sp>
+      <p:sp>
+        <p:nvSpPr>
+          <p:cNvPr id="14" name="TextBox 13"/>
+          <p:cNvSpPr txBox="1"/>
+          <p:nvPr/>
+        </p:nvSpPr>
+        <p:spPr>
+          <a:xfrm>
+            <a:off x="4690000" y="1687864"/>
+            <a:ext cx="3260000" cy="330000"/>
+          </a:xfrm>
+          <a:prstGeom prst="rect">
+            <a:avLst/>
+          </a:prstGeom>
+          <a:noFill/>
+        </p:spPr>
+        <p:txBody>
+          <a:bodyPr wrap="square">
+            <a:spAutoFit/>
+          </a:bodyPr>
+          <a:lstStyle/>
+          <a:p>
+            <a:r>
+              <a:rPr b="0" sz="1100">
+                <a:solidFill>
+                  <a:srgbClr val="444455"/>
+                </a:solidFill>
+              </a:rPr>
+              <a:t>desire: information-seeking  |  confrontation: ~0.4  |  expression: careful</a:t>
+            </a:r>
+          </a:p>
+          <a:p>
+            <a:r>
+              <a:rPr b="0" sz="1100">
+                <a:solidFill>
+                  <a:srgbClr val="1E6FA8"/>
+                </a:solidFill>
+              </a:rPr>
+              <a:t>Direction: "Question the player's motivation with measured scepticism"</a:t>
+            </a:r>
+          </a:p>
+        </p:txBody>
+      </p:sp>
+      <p:sp>
+        <p:nvSpPr>
+          <p:cNvPr id="15" name="Rectangle 14"/>
+          <p:cNvSpPr/>
+          <p:nvPr/>
+        </p:nvSpPr>
+        <p:spPr>
+          <a:xfrm>
+            <a:off x="4620000" y="2117864"/>
+            <a:ext cx="3400000" cy="760000"/>
+          </a:xfrm>
+          <a:prstGeom prst="rect">
+            <a:avLst/>
+          </a:prstGeom>
+          <a:solidFill>
+            <a:srgbClr val="FFFFFF"/>
+          </a:solidFill>
+          <a:ln>
+            <a:noFill/>
+          </a:ln>
+        </p:spPr>
+        <p:style>
+          <a:lnRef idx="1">
+            <a:schemeClr val="accent1"/>
+          </a:lnRef>
+          <a:fillRef idx="3">
+            <a:schemeClr val="accent1"/>
+          </a:fillRef>
+          <a:effectRef idx="2">
+            <a:schemeClr val="accent1"/>
+          </a:effectRef>
+          <a:fontRef idx="minor">
+            <a:schemeClr val="lt1"/>
+          </a:fontRef>
+        </p:style>
+        <p:txBody>
+          <a:bodyPr rtlCol="0" anchor="ctr"/>
+          <a:lstStyle/>
+          <a:p>
+            <a:pPr algn="ctr"/>
+          </a:p>
+        </p:txBody>
+      </p:sp>
+      <p:sp>
+        <p:nvSpPr>
+          <p:cNvPr id="16" name="Rectangle 15"/>
+          <p:cNvSpPr/>
+          <p:nvPr/>
+        </p:nvSpPr>
+        <p:spPr>
+          <a:xfrm>
+            <a:off x="4620000" y="2117864"/>
+            <a:ext cx="3400000" cy="330000"/>
+          </a:xfrm>
+          <a:prstGeom prst="rect">
+            <a:avLst/>
+          </a:prstGeom>
+          <a:solidFill>
+            <a:srgbClr val="C03A3A"/>
+          </a:solidFill>
+          <a:ln>
+            <a:noFill/>
+          </a:ln>
+        </p:spPr>
+        <p:style>
+          <a:lnRef idx="1">
+            <a:schemeClr val="accent1"/>
+          </a:lnRef>
+          <a:fillRef idx="3">
+            <a:schemeClr val="accent1"/>
+          </a:fillRef>
+          <a:effectRef idx="2">
+            <a:schemeClr val="accent1"/>
+          </a:effectRef>
+          <a:fontRef idx="minor">
+            <a:schemeClr val="lt1"/>
+          </a:fontRef>
+        </p:style>
+        <p:txBody>
+          <a:bodyPr rtlCol="0" anchor="ctr"/>
+          <a:lstStyle/>
+          <a:p>
+            <a:pPr algn="ctr"/>
+          </a:p>
+        </p:txBody>
+      </p:sp>
+      <p:sp>
+        <p:nvSpPr>
+          <p:cNvPr id="17" name="TextBox 16"/>
+          <p:cNvSpPr txBox="1"/>
+          <p:nvPr/>
+        </p:nvSpPr>
+        <p:spPr>
+          <a:xfrm>
+            <a:off x="4690000" y="2182864"/>
+            <a:ext cx="3260000" cy="280000"/>
+          </a:xfrm>
+          <a:prstGeom prst="rect">
+            <a:avLst/>
+          </a:prstGeom>
+          <a:noFill/>
+        </p:spPr>
+        <p:txBody>
+          <a:bodyPr wrap="square">
+            <a:spAutoFit/>
+          </a:bodyPr>
+          <a:lstStyle/>
+          <a:p>
+            <a:pPr algn="l"/>
+            <a:r>
+              <a:rPr b="1" i="0" sz="1100">
+                <a:solidFill>
+                  <a:srgbClr val="FFFFFF"/>
+                </a:solidFill>
+              </a:rPr>
+              <a:t>Example: "Defend Cause Passionately"</a:t>
+            </a:r>
+          </a:p>
+        </p:txBody>
+      </p:sp>
+      <p:sp>
+        <p:nvSpPr>
+          <p:cNvPr id="18" name="TextBox 17"/>
+          <p:cNvSpPr txBox="1"/>
+          <p:nvPr/>
+        </p:nvSpPr>
+        <p:spPr>
+          <a:xfrm>
+            <a:off x="4690000" y="2507864"/>
+            <a:ext cx="3260000" cy="330000"/>
+          </a:xfrm>
+          <a:prstGeom prst="rect">
+            <a:avLst/>
+          </a:prstGeom>
+          <a:noFill/>
+        </p:spPr>
+        <p:txBody>
+          <a:bodyPr wrap="square">
+            <a:spAutoFit/>
+          </a:bodyPr>
+          <a:lstStyle/>
+          <a:p>
+            <a:r>
+              <a:rPr b="0" sz="1100">
+                <a:solidFill>
+                  <a:srgbClr val="444455"/>
+                </a:solidFill>
+              </a:rPr>
+              <a:t>desire: protection (Martyr wildcard)  |  confrontation: 0.978  |  expression: explosive</a:t>
+            </a:r>
+          </a:p>
+          <a:p>
+            <a:r>
+              <a:rPr b="0" sz="1100">
+                <a:solidFill>
+                  <a:srgbClr val="C03A3A"/>
+                </a:solidFill>
+              </a:rPr>
+              <a:t>Direction: "Confront the player with full ideological intensity"</a:t>
+            </a:r>
+          </a:p>
+        </p:txBody>
+      </p:sp>
+      <p:sp>
+        <p:nvSpPr>
+          <p:cNvPr id="19" name="Rectangle 18"/>
+          <p:cNvSpPr/>
+          <p:nvPr/>
+        </p:nvSpPr>
+        <p:spPr>
+          <a:xfrm>
+            <a:off x="4620000" y="2937864"/>
+            <a:ext cx="3400000" cy="760000"/>
+          </a:xfrm>
+          <a:prstGeom prst="rect">
+            <a:avLst/>
+          </a:prstGeom>
+          <a:solidFill>
+            <a:srgbClr val="FFFFFF"/>
+          </a:solidFill>
+          <a:ln>
+            <a:noFill/>
+          </a:ln>
+        </p:spPr>
+        <p:style>
+          <a:lnRef idx="1">
+            <a:schemeClr val="accent1"/>
+          </a:lnRef>
+          <a:fillRef idx="3">
+            <a:schemeClr val="accent1"/>
+          </a:fillRef>
+          <a:effectRef idx="2">
+            <a:schemeClr val="accent1"/>
+          </a:effectRef>
+          <a:fontRef idx="minor">
+            <a:schemeClr val="lt1"/>
+          </a:fontRef>
+        </p:style>
+        <p:txBody>
+          <a:bodyPr rtlCol="0" anchor="ctr"/>
+          <a:lstStyle/>
+          <a:p>
+            <a:pPr algn="ctr"/>
+          </a:p>
+        </p:txBody>
+      </p:sp>
+      <p:sp>
+        <p:nvSpPr>
+          <p:cNvPr id="20" name="Rectangle 19"/>
+          <p:cNvSpPr/>
+          <p:nvPr/>
+        </p:nvSpPr>
+        <p:spPr>
+          <a:xfrm>
+            <a:off x="4620000" y="2937864"/>
+            <a:ext cx="3400000" cy="330000"/>
+          </a:xfrm>
+          <a:prstGeom prst="rect">
+            <a:avLst/>
+          </a:prstGeom>
+          <a:solidFill>
+            <a:srgbClr val="2EA05A"/>
+          </a:solidFill>
+          <a:ln>
+            <a:noFill/>
+          </a:ln>
+        </p:spPr>
+        <p:style>
+          <a:lnRef idx="1">
+            <a:schemeClr val="accent1"/>
+          </a:lnRef>
+          <a:fillRef idx="3">
+            <a:schemeClr val="accent1"/>
+          </a:fillRef>
+          <a:effectRef idx="2">
+            <a:schemeClr val="accent1"/>
+          </a:effectRef>
+          <a:fontRef idx="minor">
+            <a:schemeClr val="lt1"/>
+          </a:fontRef>
+        </p:style>
+        <p:txBody>
+          <a:bodyPr rtlCol="0" anchor="ctr"/>
+          <a:lstStyle/>
+          <a:p>
+            <a:pPr algn="ctr"/>
+          </a:p>
+        </p:txBody>
+      </p:sp>
+      <p:sp>
+        <p:nvSpPr>
+          <p:cNvPr id="21" name="TextBox 20"/>
+          <p:cNvSpPr txBox="1"/>
+          <p:nvPr/>
+        </p:nvSpPr>
+        <p:spPr>
+          <a:xfrm>
+            <a:off x="4690000" y="3002864"/>
+            <a:ext cx="3260000" cy="280000"/>
+          </a:xfrm>
+          <a:prstGeom prst="rect">
+            <a:avLst/>
+          </a:prstGeom>
+          <a:noFill/>
+        </p:spPr>
+        <p:txBody>
+          <a:bodyPr wrap="square">
+            <a:spAutoFit/>
+          </a:bodyPr>
+          <a:lstStyle/>
+          <a:p>
+            <a:pPr algn="l"/>
+            <a:r>
+              <a:rPr b="1" i="0" sz="1100">
+                <a:solidFill>
+                  <a:srgbClr val="FFFFFF"/>
+                </a:solidFill>
+              </a:rPr>
+              <a:t>Example: "Accept Conditionally"</a:t>
+            </a:r>
+          </a:p>
+        </p:txBody>
+      </p:sp>
+      <p:sp>
+        <p:nvSpPr>
+          <p:cNvPr id="22" name="TextBox 21"/>
+          <p:cNvSpPr txBox="1"/>
+          <p:nvPr/>
+        </p:nvSpPr>
+        <p:spPr>
+          <a:xfrm>
+            <a:off x="4690000" y="3327864"/>
+            <a:ext cx="3260000" cy="330000"/>
+          </a:xfrm>
+          <a:prstGeom prst="rect">
+            <a:avLst/>
+          </a:prstGeom>
+          <a:noFill/>
+        </p:spPr>
+        <p:txBody>
+          <a:bodyPr wrap="square">
+            <a:spAutoFit/>
+          </a:bodyPr>
+          <a:lstStyle/>
+          <a:p>
+            <a:r>
+              <a:rPr b="0" sz="1100">
+                <a:solidFill>
+                  <a:srgbClr val="444455"/>
+                </a:solidFill>
+              </a:rPr>
+              <a:t>desire: affiliation  |  confrontation: ~0.3  |  expression: calm</a:t>
+            </a:r>
+          </a:p>
+          <a:p>
+            <a:r>
+              <a:rPr b="0" sz="1100">
+                <a:solidFill>
+                  <a:srgbClr val="2EA05A"/>
+                </a:solidFill>
+              </a:rPr>
+              <a:t>Direction: "Show willingness but attach a clear condition or expectation"</a:t>
+            </a:r>
+          </a:p>
+        </p:txBody>
+      </p:sp>
+      <p:sp>
+        <p:nvSpPr>
+          <p:cNvPr id="23" name="Rectangle 22"/>
+          <p:cNvSpPr/>
+          <p:nvPr/>
+        </p:nvSpPr>
+        <p:spPr>
+          <a:xfrm>
+            <a:off x="8220000" y="1297864"/>
+            <a:ext cx="3748952" cy="2600000"/>
+          </a:xfrm>
+          <a:prstGeom prst="rect">
+            <a:avLst/>
+          </a:prstGeom>
+          <a:solidFill>
+            <a:srgbClr val="FFFFFF"/>
+          </a:solidFill>
+          <a:ln>
+            <a:noFill/>
+          </a:ln>
+        </p:spPr>
+        <p:style>
+          <a:lnRef idx="1">
+            <a:schemeClr val="accent1"/>
+          </a:lnRef>
+          <a:fillRef idx="3">
+            <a:schemeClr val="accent1"/>
+          </a:fillRef>
+          <a:effectRef idx="2">
+            <a:schemeClr val="accent1"/>
+          </a:effectRef>
+          <a:fontRef idx="minor">
+            <a:schemeClr val="lt1"/>
+          </a:fontRef>
+        </p:style>
+        <p:txBody>
+          <a:bodyPr rtlCol="0" anchor="ctr"/>
+          <a:lstStyle/>
+          <a:p>
+            <a:pPr algn="ctr"/>
+          </a:p>
+        </p:txBody>
+      </p:sp>
+      <p:sp>
+        <p:nvSpPr>
+          <p:cNvPr id="24" name="Rectangle 23"/>
+          <p:cNvSpPr/>
+          <p:nvPr/>
+        </p:nvSpPr>
+        <p:spPr>
+          <a:xfrm>
+            <a:off x="8220000" y="1297864"/>
+            <a:ext cx="3748952" cy="330000"/>
+          </a:xfrm>
+          <a:prstGeom prst="rect">
+            <a:avLst/>
+          </a:prstGeom>
+          <a:solidFill>
+            <a:srgbClr val="0D2B45"/>
+          </a:solidFill>
+          <a:ln>
+            <a:noFill/>
+          </a:ln>
+        </p:spPr>
+        <p:style>
+          <a:lnRef idx="1">
+            <a:schemeClr val="accent1"/>
+          </a:lnRef>
+          <a:fillRef idx="3">
+            <a:schemeClr val="accent1"/>
+          </a:fillRef>
+          <a:effectRef idx="2">
+            <a:schemeClr val="accent1"/>
+          </a:effectRef>
+          <a:fontRef idx="minor">
+            <a:schemeClr val="lt1"/>
+          </a:fontRef>
+        </p:style>
+        <p:txBody>
+          <a:bodyPr rtlCol="0" anchor="ctr"/>
+          <a:lstStyle/>
+          <a:p>
+            <a:pPr algn="ctr"/>
+          </a:p>
+        </p:txBody>
+      </p:sp>
+      <p:sp>
+        <p:nvSpPr>
+          <p:cNvPr id="25" name="TextBox 24"/>
+          <p:cNvSpPr txBox="1"/>
+          <p:nvPr/>
+        </p:nvSpPr>
+        <p:spPr>
+          <a:xfrm>
+            <a:off x="8290000" y="1362864"/>
+            <a:ext cx="3608952" cy="280000"/>
+          </a:xfrm>
+          <a:prstGeom prst="rect">
+            <a:avLst/>
+          </a:prstGeom>
+          <a:noFill/>
+        </p:spPr>
+        <p:txBody>
+          <a:bodyPr wrap="square">
+            <a:spAutoFit/>
+          </a:bodyPr>
+          <a:lstStyle/>
+          <a:p>
+            <a:pPr algn="l"/>
+            <a:r>
+              <a:rPr b="1" i="0" sz="1100">
+                <a:solidFill>
+                  <a:srgbClr val="FFFFFF"/>
+                </a:solidFill>
+              </a:rPr>
+              <a:t>What goes to Ollama (LLM input):</a:t>
+            </a:r>
+          </a:p>
+        </p:txBody>
+      </p:sp>
+      <p:sp>
+        <p:nvSpPr>
+          <p:cNvPr id="26" name="TextBox 25"/>
+          <p:cNvSpPr txBox="1"/>
+          <p:nvPr/>
+        </p:nvSpPr>
+        <p:spPr>
+          <a:xfrm>
+            <a:off x="8290000" y="1687864"/>
+            <a:ext cx="3608952" cy="2170000"/>
+          </a:xfrm>
+          <a:prstGeom prst="rect">
+            <a:avLst/>
+          </a:prstGeom>
+          <a:noFill/>
+        </p:spPr>
+        <p:txBody>
+          <a:bodyPr wrap="square">
+            <a:spAutoFit/>
+          </a:bodyPr>
+          <a:lstStyle/>
+          <a:p>
+            <a:r>
+              <a:rPr b="1" sz="1100">
+                <a:solidFill>
+                  <a:srgbClr val="0D2B45"/>
+                </a:solidFill>
+              </a:rPr>
+              <a:t>intention name</a:t>
+            </a:r>
+          </a:p>
+          <a:p>
+            <a:r>
+              <a:rPr b="0" sz="1100">
+                <a:solidFill>
+                  <a:srgbClr val="444455"/>
+                </a:solidFill>
+              </a:rPr>
+              <a:t>  e.g.  "Defend Cause Passionately"</a:t>
+            </a:r>
+          </a:p>
+          <a:p>
+            <a:r>
+              <a:rPr b="1" sz="1100">
+                <a:solidFill>
+                  <a:srgbClr val="0D2B45"/>
+                </a:solidFill>
+              </a:rPr>
+              <a:t>confrontation_level   0.0 – 1.0</a:t>
+            </a:r>
+          </a:p>
+          <a:p>
+            <a:r>
+              <a:rPr b="0" sz="1100">
+                <a:solidFill>
+                  <a:srgbClr val="444455"/>
+                </a:solidFill>
+              </a:rPr>
+              <a:t>expression_type      explosive</a:t>
+            </a:r>
+          </a:p>
+          <a:p>
+            <a:r>
+              <a:rPr b="0" sz="1100">
+                <a:solidFill>
+                  <a:srgbClr val="444455"/>
+                </a:solidFill>
+              </a:rPr>
+              <a:t>internal_thought     (NPC's private reaction)</a:t>
+            </a:r>
+          </a:p>
+          <a:p>
+            <a:r>
+              <a:rPr b="0" sz="1100">
+                <a:solidFill>
+                  <a:srgbClr val="444455"/>
+                </a:solidFill>
+              </a:rPr>
+              <a:t>subjective_belief    (what NPC thinks of player)</a:t>
+            </a:r>
+          </a:p>
+          <a:p>
+            <a:r>
+              <a:rPr b="0" sz="1100">
+                <a:solidFill>
+                  <a:srgbClr val="444455"/>
+                </a:solidFill>
+              </a:rPr>
+              <a:t>emotional_valence    −1.0 to +1.0</a:t>
+            </a:r>
+          </a:p>
+          <a:p>
+            <a:r>
+              <a:rPr b="0" sz="1100">
+                <a:solidFill>
+                  <a:srgbClr val="444455"/>
+                </a:solidFill>
+              </a:rPr>
+              <a:t>NPC personality summary</a:t>
+            </a:r>
+          </a:p>
+          <a:p>
+            <a:r>
+              <a:rPr b="0" sz="1100">
+                <a:solidFill>
+                  <a:srgbClr val="444455"/>
+                </a:solidFill>
+              </a:rPr>
+              <a:t/>
+            </a:r>
+          </a:p>
+          <a:p>
+            <a:r>
+              <a:rPr b="1" sz="1100">
+                <a:solidFill>
+                  <a:srgbClr val="2AB4C4"/>
+                </a:solidFill>
+              </a:rPr>
+              <a:t>The LLM ONLY handles tone and phrasing.</a:t>
+            </a:r>
+          </a:p>
+          <a:p>
+            <a:r>
+              <a:rPr b="1" sz="1100">
+                <a:solidFill>
+                  <a:srgbClr val="2AB4C4"/>
+                </a:solidFill>
+              </a:rPr>
+              <a:t>The psychology is ALREADY decided.</a:t>
+            </a:r>
+          </a:p>
+          <a:p>
+            <a:r>
+              <a:rPr b="0" sz="1100">
+                <a:solidFill>
+                  <a:srgbClr val="444455"/>
+                </a:solidFill>
+              </a:rPr>
+              <a:t>This is the key architectural separation.</a:t>
+            </a:r>
+          </a:p>
+        </p:txBody>
+      </p:sp>
+      <p:sp>
+        <p:nvSpPr>
+          <p:cNvPr id="27" name="Rectangle 26"/>
+          <p:cNvSpPr/>
+          <p:nvPr/>
+        </p:nvSpPr>
+        <p:spPr>
+          <a:xfrm>
+            <a:off x="220000" y="3997864"/>
+            <a:ext cx="5774476" cy="2780136"/>
+          </a:xfrm>
+          <a:prstGeom prst="rect">
+            <a:avLst/>
+          </a:prstGeom>
+          <a:solidFill>
+            <a:srgbClr val="FFFFFF"/>
+          </a:solidFill>
+          <a:ln>
+            <a:noFill/>
+          </a:ln>
+        </p:spPr>
+        <p:style>
+          <a:lnRef idx="1">
+            <a:schemeClr val="accent1"/>
+          </a:lnRef>
+          <a:fillRef idx="3">
+            <a:schemeClr val="accent1"/>
+          </a:fillRef>
+          <a:effectRef idx="2">
+            <a:schemeClr val="accent1"/>
+          </a:effectRef>
+          <a:fontRef idx="minor">
+            <a:schemeClr val="lt1"/>
+          </a:fontRef>
+        </p:style>
+        <p:txBody>
+          <a:bodyPr rtlCol="0" anchor="ctr"/>
+          <a:lstStyle/>
+          <a:p>
+            <a:pPr algn="ctr"/>
+          </a:p>
+        </p:txBody>
+      </p:sp>
+      <p:sp>
+        <p:nvSpPr>
+          <p:cNvPr id="28" name="Rectangle 27"/>
+          <p:cNvSpPr/>
+          <p:nvPr/>
+        </p:nvSpPr>
+        <p:spPr>
+          <a:xfrm>
+            <a:off x="220000" y="3997864"/>
+            <a:ext cx="5774476" cy="330000"/>
+          </a:xfrm>
+          <a:prstGeom prst="rect">
+            <a:avLst/>
+          </a:prstGeom>
+          <a:solidFill>
+            <a:srgbClr val="0D2B45"/>
+          </a:solidFill>
+          <a:ln>
+            <a:noFill/>
+          </a:ln>
+        </p:spPr>
+        <p:style>
+          <a:lnRef idx="1">
+            <a:schemeClr val="accent1"/>
+          </a:lnRef>
+          <a:fillRef idx="3">
+            <a:schemeClr val="accent1"/>
+          </a:fillRef>
+          <a:effectRef idx="2">
+            <a:schemeClr val="accent1"/>
+          </a:effectRef>
+          <a:fontRef idx="minor">
+            <a:schemeClr val="lt1"/>
+          </a:fontRef>
+        </p:style>
+        <p:txBody>
+          <a:bodyPr rtlCol="0" anchor="ctr"/>
+          <a:lstStyle/>
+          <a:p>
+            <a:pPr algn="ctr"/>
+          </a:p>
+        </p:txBody>
+      </p:sp>
+      <p:sp>
+        <p:nvSpPr>
+          <p:cNvPr id="29" name="TextBox 28"/>
+          <p:cNvSpPr txBox="1"/>
+          <p:nvPr/>
+        </p:nvSpPr>
+        <p:spPr>
+          <a:xfrm>
+            <a:off x="290000" y="4062864"/>
+            <a:ext cx="5634476" cy="280000"/>
+          </a:xfrm>
+          <a:prstGeom prst="rect">
+            <a:avLst/>
+          </a:prstGeom>
+          <a:noFill/>
+        </p:spPr>
+        <p:txBody>
+          <a:bodyPr wrap="square">
+            <a:spAutoFit/>
+          </a:bodyPr>
+          <a:lstStyle/>
+          <a:p>
+            <a:pPr algn="l"/>
+            <a:r>
+              <a:rPr b="1" i="0" sz="1100">
+                <a:solidFill>
+                  <a:srgbClr val="FFFFFF"/>
+                </a:solidFill>
+              </a:rPr>
+              <a:t>The full BDI flow (one turn):</a:t>
+            </a:r>
+          </a:p>
+        </p:txBody>
+      </p:sp>
+      <p:sp>
+        <p:nvSpPr>
+          <p:cNvPr id="30" name="TextBox 29"/>
+          <p:cNvSpPr txBox="1"/>
+          <p:nvPr/>
+        </p:nvSpPr>
+        <p:spPr>
+          <a:xfrm>
+            <a:off x="290000" y="4387864"/>
+            <a:ext cx="5634476" cy="2350136"/>
+          </a:xfrm>
+          <a:prstGeom prst="rect">
+            <a:avLst/>
+          </a:prstGeom>
+          <a:noFill/>
+        </p:spPr>
+        <p:txBody>
+          <a:bodyPr wrap="square">
+            <a:spAutoFit/>
+          </a:bodyPr>
+          <a:lstStyle/>
+          <a:p>
+            <a:r>
+              <a:rPr b="0" sz="1100">
+                <a:solidFill>
+                  <a:srgbClr val="444455"/>
+                </a:solidFill>
+              </a:rPr>
+              <a:t>Player choice  →  [Cognitive Layer]  →  belief + bias</a:t>
+            </a:r>
+          </a:p>
+          <a:p>
+            <a:r>
+              <a:rPr b="0" sz="1100">
+                <a:solidFill>
+                  <a:srgbClr val="444455"/>
+                </a:solidFill>
+              </a:rPr>
+              <a:t>belief  →  [Desire Layer]  →  desire type (IAPD)</a:t>
+            </a:r>
+          </a:p>
+          <a:p>
+            <a:r>
+              <a:rPr b="0" sz="1100">
+                <a:solidFill>
+                  <a:srgbClr val="444455"/>
+                </a:solidFill>
+              </a:rPr>
+              <a:t>desire  →  [Socialisation Layer]  →  named intention</a:t>
+            </a:r>
+          </a:p>
+          <a:p>
+            <a:r>
+              <a:rPr b="0" sz="1100">
+                <a:solidFill>
+                  <a:srgbClr val="444455"/>
+                </a:solidFill>
+              </a:rPr>
+              <a:t>intention  →  Ollama  →  spoken NPC dialogue</a:t>
+            </a:r>
+          </a:p>
+          <a:p>
+            <a:r>
+              <a:rPr b="0" sz="1100">
+                <a:solidFill>
+                  <a:srgbClr val="444455"/>
+                </a:solidFill>
+              </a:rPr>
+              <a:t/>
+            </a:r>
+          </a:p>
+          <a:p>
+            <a:r>
+              <a:rPr b="1" sz="1100">
+                <a:solidFill>
+                  <a:srgbClr val="1E6FA8"/>
+                </a:solidFill>
+              </a:rPr>
+              <a:t>Outcome layer: stance_delta + relation_delta + FSM routing</a:t>
+            </a:r>
+          </a:p>
+          <a:p>
+            <a:r>
+              <a:rPr b="0" sz="1100">
+                <a:solidFill>
+                  <a:srgbClr val="444455"/>
+                </a:solidFill>
+              </a:rPr>
+              <a:t>judgement score accumulates across turns → terminal condition</a:t>
+            </a:r>
+          </a:p>
+        </p:txBody>
+      </p:sp>
+      <p:sp>
+        <p:nvSpPr>
+          <p:cNvPr id="31" name="Rectangle 30"/>
+          <p:cNvSpPr/>
+          <p:nvPr/>
+        </p:nvSpPr>
+        <p:spPr>
+          <a:xfrm>
+            <a:off x="6194476" y="3997864"/>
+            <a:ext cx="5774476" cy="2780136"/>
+          </a:xfrm>
+          <a:prstGeom prst="rect">
+            <a:avLst/>
+          </a:prstGeom>
+          <a:solidFill>
+            <a:srgbClr val="FFFFFF"/>
+          </a:solidFill>
+          <a:ln>
+            <a:noFill/>
+          </a:ln>
+        </p:spPr>
+        <p:style>
+          <a:lnRef idx="1">
+            <a:schemeClr val="accent1"/>
+          </a:lnRef>
+          <a:fillRef idx="3">
+            <a:schemeClr val="accent1"/>
+          </a:fillRef>
+          <a:effectRef idx="2">
+            <a:schemeClr val="accent1"/>
+          </a:effectRef>
+          <a:fontRef idx="minor">
+            <a:schemeClr val="lt1"/>
+          </a:fontRef>
+        </p:style>
+        <p:txBody>
+          <a:bodyPr rtlCol="0" anchor="ctr"/>
+          <a:lstStyle/>
+          <a:p>
+            <a:pPr algn="ctr"/>
+          </a:p>
+        </p:txBody>
+      </p:sp>
+      <p:sp>
+        <p:nvSpPr>
+          <p:cNvPr id="32" name="Rectangle 31"/>
+          <p:cNvSpPr/>
+          <p:nvPr/>
+        </p:nvSpPr>
+        <p:spPr>
+          <a:xfrm>
+            <a:off x="6194476" y="3997864"/>
+            <a:ext cx="5774476" cy="330000"/>
+          </a:xfrm>
+          <a:prstGeom prst="rect">
+            <a:avLst/>
+          </a:prstGeom>
+          <a:solidFill>
+            <a:srgbClr val="0D2B45"/>
+          </a:solidFill>
+          <a:ln>
+            <a:noFill/>
+          </a:ln>
+        </p:spPr>
+        <p:style>
+          <a:lnRef idx="1">
+            <a:schemeClr val="accent1"/>
+          </a:lnRef>
+          <a:fillRef idx="3">
+            <a:schemeClr val="accent1"/>
+          </a:fillRef>
+          <a:effectRef idx="2">
+            <a:schemeClr val="accent1"/>
+          </a:effectRef>
+          <a:fontRef idx="minor">
+            <a:schemeClr val="lt1"/>
+          </a:fontRef>
+        </p:style>
+        <p:txBody>
+          <a:bodyPr rtlCol="0" anchor="ctr"/>
+          <a:lstStyle/>
+          <a:p>
+            <a:pPr algn="ctr"/>
+          </a:p>
+        </p:txBody>
+      </p:sp>
+      <p:sp>
+        <p:nvSpPr>
+          <p:cNvPr id="33" name="TextBox 32"/>
+          <p:cNvSpPr txBox="1"/>
+          <p:nvPr/>
+        </p:nvSpPr>
+        <p:spPr>
+          <a:xfrm>
+            <a:off x="6264476" y="4062864"/>
+            <a:ext cx="5634476" cy="280000"/>
+          </a:xfrm>
+          <a:prstGeom prst="rect">
+            <a:avLst/>
+          </a:prstGeom>
+          <a:noFill/>
+        </p:spPr>
+        <p:txBody>
+          <a:bodyPr wrap="square">
+            <a:spAutoFit/>
+          </a:bodyPr>
+          <a:lstStyle/>
+          <a:p>
+            <a:pPr algn="l"/>
+            <a:r>
+              <a:rPr b="1" i="0" sz="1100">
+                <a:solidFill>
+                  <a:srgbClr val="FFFFFF"/>
+                </a:solidFill>
+              </a:rPr>
+              <a:t>Memory Hook  —  say it to yourself:</a:t>
+            </a:r>
+          </a:p>
+        </p:txBody>
+      </p:sp>
+      <p:sp>
+        <p:nvSpPr>
+          <p:cNvPr id="34" name="TextBox 33"/>
+          <p:cNvSpPr txBox="1"/>
+          <p:nvPr/>
+        </p:nvSpPr>
+        <p:spPr>
+          <a:xfrm>
+            <a:off x="6264476" y="4387864"/>
+            <a:ext cx="5634476" cy="2350136"/>
+          </a:xfrm>
+          <a:prstGeom prst="rect">
+            <a:avLst/>
+          </a:prstGeom>
+          <a:noFill/>
+        </p:spPr>
+        <p:txBody>
+          <a:bodyPr wrap="square">
+            <a:spAutoFit/>
+          </a:bodyPr>
+          <a:lstStyle/>
+          <a:p>
+            <a:r>
+              <a:rPr b="1" sz="1100">
+                <a:solidFill>
+                  <a:srgbClr val="0D2B45"/>
+                </a:solidFill>
+              </a:rPr>
+              <a:t>"The actor picks a script direction — then the AI performs it"</a:t>
+            </a:r>
+          </a:p>
+          <a:p>
+            <a:r>
+              <a:rPr b="0" sz="1100">
+                <a:solidFill>
+                  <a:srgbClr val="444455"/>
+                </a:solidFill>
+              </a:rPr>
+              <a:t/>
+            </a:r>
+          </a:p>
+          <a:p>
+            <a:r>
+              <a:rPr b="0" sz="1100">
+                <a:solidFill>
+                  <a:srgbClr val="444455"/>
+                </a:solidFill>
+              </a:rPr>
+              <a:t>19 intentions = finite, author-controlled expressive range</a:t>
+            </a:r>
+          </a:p>
+          <a:p>
+            <a:r>
+              <a:rPr b="0" sz="1100">
+                <a:solidFill>
+                  <a:srgbClr val="444455"/>
+                </a:solidFill>
+              </a:rPr>
+              <a:t>Confrontation clamped = NPC personality is always respected</a:t>
+            </a:r>
+          </a:p>
+          <a:p>
+            <a:r>
+              <a:rPr b="1" sz="1100">
+                <a:solidFill>
+                  <a:srgbClr val="2AB4C4"/>
+                </a:solidFill>
+              </a:rPr>
+              <a:t>LLM speaks the result — it does NOT decide the behaviour</a:t>
+            </a:r>
+          </a:p>
+          <a:p>
+            <a:r>
+              <a:rPr b="0" sz="1100">
+                <a:solidFill>
+                  <a:srgbClr val="444455"/>
+                </a:solidFill>
+              </a:rPr>
+              <a:t/>
+            </a:r>
+          </a:p>
+          <a:p>
+            <a:r>
+              <a:rPr b="1" sz="1100">
+                <a:solidFill>
+                  <a:srgbClr val="0D2B45"/>
+                </a:solidFill>
+              </a:rPr>
+              <a:t>Together the three layers are:</a:t>
+            </a:r>
+          </a:p>
+          <a:p>
+            <a:r>
+              <a:rPr b="1" sz="1100">
+                <a:solidFill>
+                  <a:srgbClr val="1E6FA8"/>
+                </a:solidFill>
+              </a:rPr>
+              <a:t>  Cognitive = THINK   |   Desire = WANT   |   Socialisation = ACT</a:t>
+            </a:r>
+          </a:p>
+        </p:txBody>
+      </p:sp>
+    </p:spTree>
+  </p:cSld>
+  <p:clrMapOvr>
+    <a:masterClrMapping/>
+  </p:clrMapOvr>
+</p:sld>
+</file>
+
+<file path=ppt/slides/slide14.xml><?xml version="1.0" encoding="utf-8"?>
+<p:sld xmlns:a="http://schemas.openxmlformats.org/drawingml/2006/main" xmlns:p="http://schemas.openxmlformats.org/presentationml/2006/main" xmlns:r="http://schemas.openxmlformats.org/officeDocument/2006/relationships">
+  <p:cSld>
+    <p:spTree>
+      <p:nvGrpSpPr>
+        <p:cNvPr id="1" name=""/>
+        <p:cNvGrpSpPr/>
+        <p:nvPr/>
+      </p:nvGrpSpPr>
+      <p:grpSpPr/>
+      <p:sp>
+        <p:nvSpPr>
+          <p:cNvPr id="2" name="Rectangle 1"/>
+          <p:cNvSpPr/>
+          <p:nvPr/>
+        </p:nvSpPr>
+        <p:spPr>
+          <a:xfrm>
+            <a:off x="0" y="0"/>
+            <a:ext cx="12188952" cy="1143000"/>
+          </a:xfrm>
+          <a:prstGeom prst="rect">
+            <a:avLst/>
+          </a:prstGeom>
+          <a:solidFill>
+            <a:srgbClr val="0D2B45"/>
+          </a:solidFill>
+          <a:ln>
+            <a:noFill/>
+          </a:ln>
+        </p:spPr>
+        <p:style>
+          <a:lnRef idx="1">
+            <a:schemeClr val="accent1"/>
+          </a:lnRef>
+          <a:fillRef idx="3">
+            <a:schemeClr val="accent1"/>
+          </a:fillRef>
+          <a:effectRef idx="2">
+            <a:schemeClr val="accent1"/>
+          </a:effectRef>
+          <a:fontRef idx="minor">
+            <a:schemeClr val="lt1"/>
+          </a:fontRef>
+        </p:style>
+        <p:txBody>
+          <a:bodyPr rtlCol="0" anchor="ctr"/>
+          <a:lstStyle/>
+          <a:p>
+            <a:pPr algn="ctr"/>
+          </a:p>
+        </p:txBody>
+      </p:sp>
+      <p:sp>
+        <p:nvSpPr>
+          <p:cNvPr id="3" name="Rectangle 2"/>
+          <p:cNvSpPr/>
+          <p:nvPr/>
+        </p:nvSpPr>
+        <p:spPr>
+          <a:xfrm>
+            <a:off x="0" y="1143000"/>
+            <a:ext cx="12188952" cy="54864"/>
+          </a:xfrm>
+          <a:prstGeom prst="rect">
+            <a:avLst/>
+          </a:prstGeom>
+          <a:solidFill>
+            <a:srgbClr val="2AB4C4"/>
+          </a:solidFill>
+          <a:ln>
+            <a:noFill/>
+          </a:ln>
+        </p:spPr>
+        <p:style>
+          <a:lnRef idx="1">
+            <a:schemeClr val="accent1"/>
+          </a:lnRef>
+          <a:fillRef idx="3">
+            <a:schemeClr val="accent1"/>
+          </a:fillRef>
+          <a:effectRef idx="2">
+            <a:schemeClr val="accent1"/>
+          </a:effectRef>
+          <a:fontRef idx="minor">
+            <a:schemeClr val="lt1"/>
+          </a:fontRef>
+        </p:style>
+        <p:txBody>
+          <a:bodyPr rtlCol="0" anchor="ctr"/>
+          <a:lstStyle/>
+          <a:p>
+            <a:pPr algn="ctr"/>
+          </a:p>
+        </p:txBody>
+      </p:sp>
+      <p:sp>
+        <p:nvSpPr>
+          <p:cNvPr id="4" name="Rectangle 3"/>
+          <p:cNvSpPr/>
+          <p:nvPr/>
+        </p:nvSpPr>
+        <p:spPr>
+          <a:xfrm>
+            <a:off x="0" y="1197864"/>
+            <a:ext cx="12188952" cy="5660136"/>
+          </a:xfrm>
+          <a:prstGeom prst="rect">
+            <a:avLst/>
+          </a:prstGeom>
+          <a:solidFill>
+            <a:srgbClr val="F4F6F9"/>
+          </a:solidFill>
+          <a:ln>
+            <a:noFill/>
+          </a:ln>
+        </p:spPr>
+        <p:style>
+          <a:lnRef idx="1">
+            <a:schemeClr val="accent1"/>
+          </a:lnRef>
+          <a:fillRef idx="3">
+            <a:schemeClr val="accent1"/>
+          </a:fillRef>
+          <a:effectRef idx="2">
+            <a:schemeClr val="accent1"/>
+          </a:effectRef>
+          <a:fontRef idx="minor">
+            <a:schemeClr val="lt1"/>
+          </a:fontRef>
+        </p:style>
+        <p:txBody>
+          <a:bodyPr rtlCol="0" anchor="ctr"/>
+          <a:lstStyle/>
+          <a:p>
+            <a:pPr algn="ctr"/>
+          </a:p>
+        </p:txBody>
+      </p:sp>
+      <p:sp>
+        <p:nvSpPr>
+          <p:cNvPr id="5" name="TextBox 4"/>
+          <p:cNvSpPr txBox="1"/>
+          <p:nvPr/>
+        </p:nvSpPr>
+        <p:spPr>
+          <a:xfrm>
+            <a:off x="300000" y="110000"/>
+            <a:ext cx="11500000" cy="750000"/>
+          </a:xfrm>
+          <a:prstGeom prst="rect">
+            <a:avLst/>
+          </a:prstGeom>
+          <a:noFill/>
+        </p:spPr>
+        <p:txBody>
+          <a:bodyPr wrap="square">
+            <a:spAutoFit/>
+          </a:bodyPr>
+          <a:lstStyle/>
+          <a:p>
+            <a:pPr algn="l"/>
+            <a:r>
+              <a:rPr b="1" i="0" sz="2800">
+                <a:solidFill>
+                  <a:srgbClr val="FFFFFF"/>
+                </a:solidFill>
+              </a:rPr>
+              <a:t>Results  —  Same Input, Different NPCs</a:t>
+            </a:r>
+          </a:p>
+        </p:txBody>
+      </p:sp>
+      <p:sp>
+        <p:nvSpPr>
+          <p:cNvPr id="6" name="TextBox 5"/>
+          <p:cNvSpPr txBox="1"/>
+          <p:nvPr/>
+        </p:nvSpPr>
+        <p:spPr>
+          <a:xfrm>
+            <a:off x="300000" y="810000"/>
+            <a:ext cx="11500000" cy="320000"/>
+          </a:xfrm>
+          <a:prstGeom prst="rect">
+            <a:avLst/>
+          </a:prstGeom>
+          <a:noFill/>
+        </p:spPr>
+        <p:txBody>
+          <a:bodyPr wrap="square">
+            <a:spAutoFit/>
+          </a:bodyPr>
+          <a:lstStyle/>
+          <a:p>
+            <a:pPr algn="l"/>
+            <a:r>
+              <a:rPr b="0" i="0" sz="1100">
+                <a:solidFill>
+                  <a:srgbClr val="F4F6F9"/>
+                </a:solidFill>
+              </a:rPr>
+              <a:t>Troy vs Moses: identical open_authority challenge → completely divergent pipeline states (Chapter 6.3)</a:t>
+            </a:r>
+          </a:p>
+        </p:txBody>
+      </p:sp>
+      <p:sp>
+        <p:nvSpPr>
+          <p:cNvPr id="7" name="TextBox 6"/>
+          <p:cNvSpPr txBox="1"/>
+          <p:nvPr/>
+        </p:nvSpPr>
+        <p:spPr>
+          <a:xfrm>
+            <a:off x="220000" y="1297864"/>
+            <a:ext cx="11748952" cy="260000"/>
+          </a:xfrm>
+          <a:prstGeom prst="rect">
+            <a:avLst/>
+          </a:prstGeom>
+          <a:noFill/>
+        </p:spPr>
+        <p:txBody>
+          <a:bodyPr wrap="square">
+            <a:spAutoFit/>
+          </a:bodyPr>
+          <a:lstStyle/>
+          <a:p>
+            <a:pPr algn="l"/>
+            <a:r>
+              <a:rPr b="0" i="0" sz="1200">
+                <a:solidFill>
+                  <a:srgbClr val="444455"/>
+                </a:solidFill>
+              </a:rPr>
+              <a:t>Both NPCs received the same player text.  Both produced negative emotional valence (−0.45).  Everything else diverged.</a:t>
+            </a:r>
+          </a:p>
+        </p:txBody>
+      </p:sp>
+      <p:sp>
+        <p:nvSpPr>
+          <p:cNvPr id="8" name="Rectangle 7"/>
+          <p:cNvSpPr/>
+          <p:nvPr/>
+        </p:nvSpPr>
+        <p:spPr>
+          <a:xfrm>
+            <a:off x="220000" y="1597864"/>
+            <a:ext cx="5774476" cy="2500000"/>
+          </a:xfrm>
+          <a:prstGeom prst="rect">
+            <a:avLst/>
+          </a:prstGeom>
+          <a:solidFill>
+            <a:srgbClr val="FFFFFF"/>
+          </a:solidFill>
+          <a:ln>
+            <a:noFill/>
+          </a:ln>
+        </p:spPr>
+        <p:style>
+          <a:lnRef idx="1">
+            <a:schemeClr val="accent1"/>
+          </a:lnRef>
+          <a:fillRef idx="3">
+            <a:schemeClr val="accent1"/>
+          </a:fillRef>
+          <a:effectRef idx="2">
+            <a:schemeClr val="accent1"/>
+          </a:effectRef>
+          <a:fontRef idx="minor">
+            <a:schemeClr val="lt1"/>
+          </a:fontRef>
+        </p:style>
+        <p:txBody>
+          <a:bodyPr rtlCol="0" anchor="ctr"/>
+          <a:lstStyle/>
+          <a:p>
+            <a:pPr algn="ctr"/>
+          </a:p>
+        </p:txBody>
+      </p:sp>
+      <p:sp>
+        <p:nvSpPr>
+          <p:cNvPr id="9" name="Rectangle 8"/>
+          <p:cNvSpPr/>
+          <p:nvPr/>
+        </p:nvSpPr>
+        <p:spPr>
+          <a:xfrm>
+            <a:off x="220000" y="1597864"/>
+            <a:ext cx="5774476" cy="330000"/>
+          </a:xfrm>
+          <a:prstGeom prst="rect">
+            <a:avLst/>
+          </a:prstGeom>
+          <a:solidFill>
+            <a:srgbClr val="E88A1A"/>
+          </a:solidFill>
+          <a:ln>
+            <a:noFill/>
+          </a:ln>
+        </p:spPr>
+        <p:style>
+          <a:lnRef idx="1">
+            <a:schemeClr val="accent1"/>
+          </a:lnRef>
+          <a:fillRef idx="3">
+            <a:schemeClr val="accent1"/>
+          </a:fillRef>
+          <a:effectRef idx="2">
+            <a:schemeClr val="accent1"/>
+          </a:effectRef>
+          <a:fontRef idx="minor">
+            <a:schemeClr val="lt1"/>
+          </a:fontRef>
+        </p:style>
+        <p:txBody>
+          <a:bodyPr rtlCol="0" anchor="ctr"/>
+          <a:lstStyle/>
+          <a:p>
+            <a:pPr algn="ctr"/>
+          </a:p>
+        </p:txBody>
+      </p:sp>
+      <p:sp>
+        <p:nvSpPr>
+          <p:cNvPr id="10" name="TextBox 9"/>
+          <p:cNvSpPr txBox="1"/>
+          <p:nvPr/>
+        </p:nvSpPr>
+        <p:spPr>
+          <a:xfrm>
+            <a:off x="290000" y="1662864"/>
+            <a:ext cx="5634476" cy="280000"/>
+          </a:xfrm>
+          <a:prstGeom prst="rect">
+            <a:avLst/>
+          </a:prstGeom>
+          <a:noFill/>
+        </p:spPr>
+        <p:txBody>
+          <a:bodyPr wrap="square">
+            <a:spAutoFit/>
+          </a:bodyPr>
+          <a:lstStyle/>
+          <a:p>
+            <a:pPr algn="l"/>
+            <a:r>
+              <a:rPr b="1" i="0" sz="1100">
+                <a:solidFill>
+                  <a:srgbClr val="FFFFFF"/>
+                </a:solidFill>
+              </a:rPr>
+              <a:t>TROY  —  open_authority  (same input)</a:t>
+            </a:r>
+          </a:p>
+        </p:txBody>
+      </p:sp>
+      <p:sp>
+        <p:nvSpPr>
+          <p:cNvPr id="11" name="TextBox 10"/>
+          <p:cNvSpPr txBox="1"/>
+          <p:nvPr/>
+        </p:nvSpPr>
+        <p:spPr>
+          <a:xfrm>
+            <a:off x="290000" y="1987864"/>
+            <a:ext cx="5634476" cy="2070000"/>
+          </a:xfrm>
+          <a:prstGeom prst="rect">
+            <a:avLst/>
+          </a:prstGeom>
+          <a:noFill/>
+        </p:spPr>
+        <p:txBody>
+          <a:bodyPr wrap="square">
+            <a:spAutoFit/>
+          </a:bodyPr>
+          <a:lstStyle/>
+          <a:p>
+            <a:r>
+              <a:rPr b="1" sz="1100">
+                <a:solidFill>
+                  <a:srgbClr val="0D2B45"/>
+                </a:solidFill>
+              </a:rPr>
+              <a:t>Cognitive bias:    black_white_thinking</a:t>
+            </a:r>
+          </a:p>
+          <a:p>
+            <a:r>
+              <a:rPr b="0" sz="1100">
+                <a:solidFill>
+                  <a:srgbClr val="444455"/>
+                </a:solidFill>
+              </a:rPr>
+              <a:t>  Loyalty binary — "you're with me or against me"</a:t>
+            </a:r>
+          </a:p>
+          <a:p>
+            <a:r>
+              <a:rPr b="0" sz="1100">
+                <a:solidFill>
+                  <a:srgbClr val="444455"/>
+                </a:solidFill>
+              </a:rPr>
+              <a:t/>
+            </a:r>
+          </a:p>
+          <a:p>
+            <a:r>
+              <a:rPr b="1" sz="1100">
+                <a:solidFill>
+                  <a:srgbClr val="E88A1A"/>
+                </a:solidFill>
+              </a:rPr>
+              <a:t>Desire type:       DOMINANCE</a:t>
+            </a:r>
+          </a:p>
+          <a:p>
+            <a:r>
+              <a:rPr b="0" sz="1100">
+                <a:solidFill>
+                  <a:srgbClr val="444455"/>
+                </a:solidFill>
+              </a:rPr>
+              <a:t>  Threat pattern + negative valence → assert dominance</a:t>
+            </a:r>
+          </a:p>
+          <a:p>
+            <a:r>
+              <a:rPr b="0" sz="1100">
+                <a:solidFill>
+                  <a:srgbClr val="444455"/>
+                </a:solidFill>
+              </a:rPr>
+              <a:t/>
+            </a:r>
+          </a:p>
+          <a:p>
+            <a:r>
+              <a:rPr b="1" sz="1100">
+                <a:solidFill>
+                  <a:srgbClr val="0D2B45"/>
+                </a:solidFill>
+              </a:rPr>
+              <a:t>Intention:         "Stand Firm"</a:t>
+            </a:r>
+          </a:p>
+          <a:p>
+            <a:r>
+              <a:rPr b="0" sz="1100">
+                <a:solidFill>
+                  <a:srgbClr val="444455"/>
+                </a:solidFill>
+              </a:rPr>
+              <a:t>  confrontation_level: 0.654</a:t>
+            </a:r>
+          </a:p>
+          <a:p>
+            <a:r>
+              <a:rPr b="0" sz="1100">
+                <a:solidFill>
+                  <a:srgbClr val="444455"/>
+                </a:solidFill>
+              </a:rPr>
+              <a:t>  expression_type: challenging</a:t>
+            </a:r>
+          </a:p>
+          <a:p>
+            <a:r>
+              <a:rPr b="0" sz="1100">
+                <a:solidFill>
+                  <a:srgbClr val="444455"/>
+                </a:solidFill>
+              </a:rPr>
+              <a:t/>
+            </a:r>
+          </a:p>
+          <a:p>
+            <a:r>
+              <a:rPr b="1" sz="1100">
+                <a:solidFill>
+                  <a:srgbClr val="C03A3A"/>
+                </a:solidFill>
+              </a:rPr>
+              <a:t>relation_delta:    −0.15</a:t>
+            </a:r>
+          </a:p>
+          <a:p>
+            <a:r>
+              <a:rPr b="0" sz="1100">
+                <a:solidFill>
+                  <a:srgbClr val="444455"/>
+                </a:solidFill>
+              </a:rPr>
+              <a:t/>
+            </a:r>
+          </a:p>
+          <a:p>
+            <a:r>
+              <a:rPr b="1" sz="1100">
+                <a:solidFill>
+                  <a:srgbClr val="C03A3A"/>
+                </a:solidFill>
+              </a:rPr>
+              <a:t>Root cause:  Troy's cog_flexibility = 0.1 (near-zero).</a:t>
+            </a:r>
+          </a:p>
+          <a:p>
+            <a:r>
+              <a:rPr b="0" sz="1100">
+                <a:solidFill>
+                  <a:srgbClr val="444455"/>
+                </a:solidFill>
+              </a:rPr>
+              <a:t>First impression locks in.  Hard to recover from.</a:t>
+            </a:r>
+          </a:p>
+        </p:txBody>
+      </p:sp>
+      <p:sp>
+        <p:nvSpPr>
+          <p:cNvPr id="12" name="Rectangle 11"/>
+          <p:cNvSpPr/>
+          <p:nvPr/>
+        </p:nvSpPr>
+        <p:spPr>
+          <a:xfrm>
+            <a:off x="6194476" y="1597864"/>
+            <a:ext cx="5774476" cy="2500000"/>
+          </a:xfrm>
+          <a:prstGeom prst="rect">
+            <a:avLst/>
+          </a:prstGeom>
+          <a:solidFill>
+            <a:srgbClr val="FFFFFF"/>
+          </a:solidFill>
+          <a:ln>
+            <a:noFill/>
+          </a:ln>
+        </p:spPr>
+        <p:style>
+          <a:lnRef idx="1">
+            <a:schemeClr val="accent1"/>
+          </a:lnRef>
+          <a:fillRef idx="3">
+            <a:schemeClr val="accent1"/>
+          </a:fillRef>
+          <a:effectRef idx="2">
+            <a:schemeClr val="accent1"/>
+          </a:effectRef>
+          <a:fontRef idx="minor">
+            <a:schemeClr val="lt1"/>
+          </a:fontRef>
+        </p:style>
+        <p:txBody>
+          <a:bodyPr rtlCol="0" anchor="ctr"/>
+          <a:lstStyle/>
+          <a:p>
+            <a:pPr algn="ctr"/>
+          </a:p>
+        </p:txBody>
+      </p:sp>
+      <p:sp>
+        <p:nvSpPr>
+          <p:cNvPr id="13" name="Rectangle 12"/>
+          <p:cNvSpPr/>
+          <p:nvPr/>
+        </p:nvSpPr>
+        <p:spPr>
+          <a:xfrm>
+            <a:off x="6194476" y="1597864"/>
+            <a:ext cx="5774476" cy="330000"/>
+          </a:xfrm>
+          <a:prstGeom prst="rect">
+            <a:avLst/>
+          </a:prstGeom>
+          <a:solidFill>
+            <a:srgbClr val="C03A3A"/>
+          </a:solidFill>
+          <a:ln>
+            <a:noFill/>
+          </a:ln>
+        </p:spPr>
+        <p:style>
+          <a:lnRef idx="1">
+            <a:schemeClr val="accent1"/>
+          </a:lnRef>
+          <a:fillRef idx="3">
+            <a:schemeClr val="accent1"/>
+          </a:fillRef>
+          <a:effectRef idx="2">
+            <a:schemeClr val="accent1"/>
+          </a:effectRef>
+          <a:fontRef idx="minor">
+            <a:schemeClr val="lt1"/>
+          </a:fontRef>
+        </p:style>
+        <p:txBody>
+          <a:bodyPr rtlCol="0" anchor="ctr"/>
+          <a:lstStyle/>
+          <a:p>
+            <a:pPr algn="ctr"/>
+          </a:p>
+        </p:txBody>
+      </p:sp>
+      <p:sp>
+        <p:nvSpPr>
+          <p:cNvPr id="14" name="TextBox 13"/>
+          <p:cNvSpPr txBox="1"/>
+          <p:nvPr/>
+        </p:nvSpPr>
+        <p:spPr>
+          <a:xfrm>
+            <a:off x="6264476" y="1662864"/>
+            <a:ext cx="5634476" cy="280000"/>
+          </a:xfrm>
+          <a:prstGeom prst="rect">
+            <a:avLst/>
+          </a:prstGeom>
+          <a:noFill/>
+        </p:spPr>
+        <p:txBody>
+          <a:bodyPr wrap="square">
+            <a:spAutoFit/>
+          </a:bodyPr>
+          <a:lstStyle/>
+          <a:p>
+            <a:pPr algn="l"/>
+            <a:r>
+              <a:rPr b="1" i="0" sz="1100">
+                <a:solidFill>
+                  <a:srgbClr val="FFFFFF"/>
+                </a:solidFill>
+              </a:rPr>
+              <a:t>MOSES  —  open_authority  (identical input)</a:t>
+            </a:r>
+          </a:p>
+        </p:txBody>
+      </p:sp>
+      <p:sp>
+        <p:nvSpPr>
+          <p:cNvPr id="15" name="TextBox 14"/>
+          <p:cNvSpPr txBox="1"/>
+          <p:nvPr/>
+        </p:nvSpPr>
+        <p:spPr>
+          <a:xfrm>
+            <a:off x="6264476" y="1987864"/>
+            <a:ext cx="5634476" cy="2070000"/>
+          </a:xfrm>
+          <a:prstGeom prst="rect">
+            <a:avLst/>
+          </a:prstGeom>
+          <a:noFill/>
+        </p:spPr>
+        <p:txBody>
+          <a:bodyPr wrap="square">
+            <a:spAutoFit/>
+          </a:bodyPr>
+          <a:lstStyle/>
+          <a:p>
+            <a:r>
+              <a:rPr b="1" sz="1100">
+                <a:solidFill>
+                  <a:srgbClr val="0D2B45"/>
+                </a:solidFill>
+              </a:rPr>
+              <a:t>Cognitive bias:    ideological_filter</a:t>
+            </a:r>
+          </a:p>
+          <a:p>
+            <a:r>
+              <a:rPr b="0" sz="1100">
+                <a:solidFill>
+                  <a:srgbClr val="444455"/>
+                </a:solidFill>
+              </a:rPr>
+              <a:t>  Not a loyalty test — an ideological challenge to his worldview</a:t>
+            </a:r>
+          </a:p>
+          <a:p>
+            <a:r>
+              <a:rPr b="0" sz="1100">
+                <a:solidFill>
+                  <a:srgbClr val="444455"/>
+                </a:solidFill>
+              </a:rPr>
+              <a:t/>
+            </a:r>
+          </a:p>
+          <a:p>
+            <a:r>
+              <a:rPr b="1" sz="1100">
+                <a:solidFill>
+                  <a:srgbClr val="C03A3A"/>
+                </a:solidFill>
+              </a:rPr>
+              <a:t>Desire type:       PROTECTION  +  Martyr wildcard</a:t>
+            </a:r>
+          </a:p>
+          <a:p>
+            <a:r>
+              <a:rPr b="0" sz="1100">
+                <a:solidFill>
+                  <a:srgbClr val="444455"/>
+                </a:solidFill>
+              </a:rPr>
+              <a:t>  Entrenched Utilitarian worldview triggered wildcard override</a:t>
+            </a:r>
+          </a:p>
+          <a:p>
+            <a:r>
+              <a:rPr b="0" sz="1100">
+                <a:solidFill>
+                  <a:srgbClr val="444455"/>
+                </a:solidFill>
+              </a:rPr>
+              <a:t/>
+            </a:r>
+          </a:p>
+          <a:p>
+            <a:r>
+              <a:rPr b="1" sz="1100">
+                <a:solidFill>
+                  <a:srgbClr val="0D2B45"/>
+                </a:solidFill>
+              </a:rPr>
+              <a:t>Intention:         "Defend Cause Passionately"</a:t>
+            </a:r>
+          </a:p>
+          <a:p>
+            <a:r>
+              <a:rPr b="0" sz="1100">
+                <a:solidFill>
+                  <a:srgbClr val="444455"/>
+                </a:solidFill>
+              </a:rPr>
+              <a:t>  confrontation_level: 0.978  (near-maximum)</a:t>
+            </a:r>
+          </a:p>
+          <a:p>
+            <a:r>
+              <a:rPr b="0" sz="1100">
+                <a:solidFill>
+                  <a:srgbClr val="444455"/>
+                </a:solidFill>
+              </a:rPr>
+              <a:t>  expression_type: explosive</a:t>
+            </a:r>
+          </a:p>
+          <a:p>
+            <a:r>
+              <a:rPr b="0" sz="1100">
+                <a:solidFill>
+                  <a:srgbClr val="444455"/>
+                </a:solidFill>
+              </a:rPr>
+              <a:t/>
+            </a:r>
+          </a:p>
+          <a:p>
+            <a:r>
+              <a:rPr b="1" sz="1100">
+                <a:solidFill>
+                  <a:srgbClr val="C03A3A"/>
+                </a:solidFill>
+              </a:rPr>
+              <a:t>relation_delta:    −0.20</a:t>
+            </a:r>
+          </a:p>
+          <a:p>
+            <a:r>
+              <a:rPr b="0" sz="1100">
+                <a:solidFill>
+                  <a:srgbClr val="444455"/>
+                </a:solidFill>
+              </a:rPr>
+              <a:t/>
+            </a:r>
+          </a:p>
+          <a:p>
+            <a:r>
+              <a:rPr b="1" sz="1100">
+                <a:solidFill>
+                  <a:srgbClr val="C03A3A"/>
+                </a:solidFill>
+              </a:rPr>
+              <a:t>Root cause:  Moses's max assertion (1.0) + Martyr wildcard.</a:t>
+            </a:r>
+          </a:p>
+          <a:p>
+            <a:r>
+              <a:rPr b="0" sz="1100">
+                <a:solidFill>
+                  <a:srgbClr val="444455"/>
+                </a:solidFill>
+              </a:rPr>
+              <a:t>Wildcard fires when he perceives ideological threat.</a:t>
+            </a:r>
+          </a:p>
+        </p:txBody>
+      </p:sp>
+      <p:sp>
+        <p:nvSpPr>
+          <p:cNvPr id="16" name="Rectangle 15"/>
+          <p:cNvSpPr/>
+          <p:nvPr/>
+        </p:nvSpPr>
+        <p:spPr>
+          <a:xfrm>
+            <a:off x="220000" y="4247864"/>
+            <a:ext cx="11748952" cy="2530136"/>
+          </a:xfrm>
+          <a:prstGeom prst="rect">
+            <a:avLst/>
+          </a:prstGeom>
+          <a:solidFill>
+            <a:srgbClr val="0D2B45"/>
+          </a:solidFill>
+          <a:ln>
+            <a:noFill/>
+          </a:ln>
+        </p:spPr>
+        <p:style>
+          <a:lnRef idx="1">
+            <a:schemeClr val="accent1"/>
+          </a:lnRef>
+          <a:fillRef idx="3">
+            <a:schemeClr val="accent1"/>
+          </a:fillRef>
+          <a:effectRef idx="2">
+            <a:schemeClr val="accent1"/>
+          </a:effectRef>
+          <a:fontRef idx="minor">
+            <a:schemeClr val="lt1"/>
+          </a:fontRef>
+        </p:style>
+        <p:txBody>
+          <a:bodyPr rtlCol="0" anchor="ctr"/>
+          <a:lstStyle/>
+          <a:p>
+            <a:pPr algn="ctr"/>
+          </a:p>
+        </p:txBody>
+      </p:sp>
+      <p:sp>
+        <p:nvSpPr>
+          <p:cNvPr id="17" name="TextBox 16"/>
+          <p:cNvSpPr txBox="1"/>
+          <p:nvPr/>
+        </p:nvSpPr>
+        <p:spPr>
+          <a:xfrm>
+            <a:off x="370000" y="4347864"/>
+            <a:ext cx="11448952" cy="2330136"/>
+          </a:xfrm>
+          <a:prstGeom prst="rect">
+            <a:avLst/>
+          </a:prstGeom>
+          <a:noFill/>
+        </p:spPr>
+        <p:txBody>
+          <a:bodyPr wrap="square">
+            <a:spAutoFit/>
+          </a:bodyPr>
+          <a:lstStyle/>
+          <a:p>
+            <a:r>
+              <a:rPr b="1" sz="1200">
+                <a:solidFill>
+                  <a:srgbClr val="2AB4C4"/>
+                </a:solidFill>
+              </a:rPr>
+              <a:t>Key finding:</a:t>
+            </a:r>
+          </a:p>
+          <a:p>
+            <a:r>
+              <a:rPr b="0" sz="1200">
+                <a:solidFill>
+                  <a:srgbClr val="FFFFFF"/>
+                </a:solidFill>
+              </a:rPr>
+              <a:t>The pipeline produced different bias categories, different desire states, and different intention templates</a:t>
+            </a:r>
+          </a:p>
+          <a:p>
+            <a:r>
+              <a:rPr b="0" sz="1200">
+                <a:solidFill>
+                  <a:srgbClr val="FFFFFF"/>
+                </a:solidFill>
+              </a:rPr>
+              <a:t>from IDENTICAL player input.  The divergence is 100% attributable to NPC personality parameters.</a:t>
+            </a:r>
+          </a:p>
+          <a:p>
+            <a:r>
+              <a:rPr b="1" sz="1200">
+                <a:solidFill>
+                  <a:srgbClr val="2AB4C4"/>
+                </a:solidFill>
+              </a:rPr>
+              <a:t>This is the core architectural claim of the dissertation — and the test data proves it.</a:t>
+            </a:r>
+          </a:p>
+        </p:txBody>
+      </p:sp>
+    </p:spTree>
+  </p:cSld>
+  <p:clrMapOvr>
+    <a:masterClrMapping/>
+  </p:clrMapOvr>
+</p:sld>
+</file>
+
+<file path=ppt/slides/slide15.xml><?xml version="1.0" encoding="utf-8"?>
+<p:sld xmlns:a="http://schemas.openxmlformats.org/drawingml/2006/main" xmlns:p="http://schemas.openxmlformats.org/presentationml/2006/main" xmlns:r="http://schemas.openxmlformats.org/officeDocument/2006/relationships">
+  <p:cSld>
+    <p:spTree>
+      <p:nvGrpSpPr>
+        <p:cNvPr id="1" name=""/>
+        <p:cNvGrpSpPr/>
+        <p:nvPr/>
+      </p:nvGrpSpPr>
+      <p:grpSpPr/>
+      <p:sp>
+        <p:nvSpPr>
+          <p:cNvPr id="2" name="Rectangle 1"/>
+          <p:cNvSpPr/>
+          <p:nvPr/>
+        </p:nvSpPr>
+        <p:spPr>
+          <a:xfrm>
+            <a:off x="0" y="0"/>
+            <a:ext cx="12188952" cy="1143000"/>
+          </a:xfrm>
+          <a:prstGeom prst="rect">
+            <a:avLst/>
+          </a:prstGeom>
+          <a:solidFill>
+            <a:srgbClr val="0D2B45"/>
+          </a:solidFill>
+          <a:ln>
+            <a:noFill/>
+          </a:ln>
+        </p:spPr>
+        <p:style>
+          <a:lnRef idx="1">
+            <a:schemeClr val="accent1"/>
+          </a:lnRef>
+          <a:fillRef idx="3">
+            <a:schemeClr val="accent1"/>
+          </a:fillRef>
+          <a:effectRef idx="2">
+            <a:schemeClr val="accent1"/>
+          </a:effectRef>
+          <a:fontRef idx="minor">
+            <a:schemeClr val="lt1"/>
+          </a:fontRef>
+        </p:style>
+        <p:txBody>
+          <a:bodyPr rtlCol="0" anchor="ctr"/>
+          <a:lstStyle/>
+          <a:p>
+            <a:pPr algn="ctr"/>
+          </a:p>
+        </p:txBody>
+      </p:sp>
+      <p:sp>
+        <p:nvSpPr>
+          <p:cNvPr id="3" name="Rectangle 2"/>
+          <p:cNvSpPr/>
+          <p:nvPr/>
+        </p:nvSpPr>
+        <p:spPr>
+          <a:xfrm>
+            <a:off x="0" y="1143000"/>
+            <a:ext cx="12188952" cy="54864"/>
+          </a:xfrm>
+          <a:prstGeom prst="rect">
+            <a:avLst/>
+          </a:prstGeom>
+          <a:solidFill>
+            <a:srgbClr val="2AB4C4"/>
+          </a:solidFill>
+          <a:ln>
+            <a:noFill/>
+          </a:ln>
+        </p:spPr>
+        <p:style>
+          <a:lnRef idx="1">
+            <a:schemeClr val="accent1"/>
+          </a:lnRef>
+          <a:fillRef idx="3">
+            <a:schemeClr val="accent1"/>
+          </a:fillRef>
+          <a:effectRef idx="2">
+            <a:schemeClr val="accent1"/>
+          </a:effectRef>
+          <a:fontRef idx="minor">
+            <a:schemeClr val="lt1"/>
+          </a:fontRef>
+        </p:style>
+        <p:txBody>
+          <a:bodyPr rtlCol="0" anchor="ctr"/>
+          <a:lstStyle/>
+          <a:p>
+            <a:pPr algn="ctr"/>
+          </a:p>
+        </p:txBody>
+      </p:sp>
+      <p:sp>
+        <p:nvSpPr>
+          <p:cNvPr id="4" name="Rectangle 3"/>
+          <p:cNvSpPr/>
+          <p:nvPr/>
+        </p:nvSpPr>
+        <p:spPr>
+          <a:xfrm>
+            <a:off x="0" y="1197864"/>
+            <a:ext cx="12188952" cy="5660136"/>
+          </a:xfrm>
+          <a:prstGeom prst="rect">
+            <a:avLst/>
+          </a:prstGeom>
+          <a:solidFill>
+            <a:srgbClr val="F4F6F9"/>
+          </a:solidFill>
+          <a:ln>
+            <a:noFill/>
+          </a:ln>
+        </p:spPr>
+        <p:style>
+          <a:lnRef idx="1">
+            <a:schemeClr val="accent1"/>
+          </a:lnRef>
+          <a:fillRef idx="3">
+            <a:schemeClr val="accent1"/>
+          </a:fillRef>
+          <a:effectRef idx="2">
+            <a:schemeClr val="accent1"/>
+          </a:effectRef>
+          <a:fontRef idx="minor">
+            <a:schemeClr val="lt1"/>
+          </a:fontRef>
+        </p:style>
+        <p:txBody>
+          <a:bodyPr rtlCol="0" anchor="ctr"/>
+          <a:lstStyle/>
+          <a:p>
+            <a:pPr algn="ctr"/>
+          </a:p>
+        </p:txBody>
+      </p:sp>
+      <p:sp>
+        <p:nvSpPr>
+          <p:cNvPr id="5" name="TextBox 4"/>
+          <p:cNvSpPr txBox="1"/>
+          <p:nvPr/>
+        </p:nvSpPr>
+        <p:spPr>
+          <a:xfrm>
+            <a:off x="300000" y="110000"/>
+            <a:ext cx="11500000" cy="750000"/>
+          </a:xfrm>
+          <a:prstGeom prst="rect">
+            <a:avLst/>
+          </a:prstGeom>
+          <a:noFill/>
+        </p:spPr>
+        <p:txBody>
+          <a:bodyPr wrap="square">
+            <a:spAutoFit/>
+          </a:bodyPr>
+          <a:lstStyle/>
+          <a:p>
+            <a:pPr algn="l"/>
+            <a:r>
+              <a:rPr b="1" i="0" sz="2800">
+                <a:solidFill>
+                  <a:srgbClr val="FFFFFF"/>
+                </a:solidFill>
+              </a:rPr>
+              <a:t>Results  —  Same NPC, Different Player Skills</a:t>
+            </a:r>
+          </a:p>
+        </p:txBody>
+      </p:sp>
+      <p:sp>
+        <p:nvSpPr>
+          <p:cNvPr id="6" name="TextBox 5"/>
+          <p:cNvSpPr txBox="1"/>
+          <p:nvPr/>
+        </p:nvSpPr>
+        <p:spPr>
+          <a:xfrm>
+            <a:off x="300000" y="810000"/>
+            <a:ext cx="11500000" cy="320000"/>
+          </a:xfrm>
+          <a:prstGeom prst="rect">
+            <a:avLst/>
+          </a:prstGeom>
+          <a:noFill/>
+        </p:spPr>
+        <p:txBody>
+          <a:bodyPr wrap="square">
+            <a:spAutoFit/>
+          </a:bodyPr>
+          <a:lstStyle/>
+          <a:p>
+            <a:pPr algn="l"/>
+            <a:r>
+              <a:rPr b="0" i="0" sz="1100">
+                <a:solidFill>
+                  <a:srgbClr val="F4F6F9"/>
+                </a:solidFill>
+              </a:rPr>
+              <a:t>Troy: Empathy build vs Authority build — same scenario, same choice pool → opposite terminal outcomes (Chapter 6.5)</a:t>
+            </a:r>
+          </a:p>
+        </p:txBody>
+      </p:sp>
+      <p:sp>
+        <p:nvSpPr>
+          <p:cNvPr id="7" name="TextBox 6"/>
+          <p:cNvSpPr txBox="1"/>
+          <p:nvPr/>
+        </p:nvSpPr>
+        <p:spPr>
+          <a:xfrm>
+            <a:off x="220000" y="1297864"/>
+            <a:ext cx="11748952" cy="260000"/>
+          </a:xfrm>
+          <a:prstGeom prst="rect">
+            <a:avLst/>
+          </a:prstGeom>
+          <a:noFill/>
+        </p:spPr>
+        <p:txBody>
+          <a:bodyPr wrap="square">
+            <a:spAutoFit/>
+          </a:bodyPr>
+          <a:lstStyle/>
+          <a:p>
+            <a:pPr algn="l"/>
+            <a:r>
+              <a:rPr b="0" i="0" sz="1200">
+                <a:solidFill>
+                  <a:srgbClr val="444455"/>
+                </a:solidFill>
+              </a:rPr>
+              <a:t>door_guard_night scenario run twice against Troy.  Same NPC, same scenario, same choices available.  Only the PlayerSkillSet changed.</a:t>
+            </a:r>
+          </a:p>
+        </p:txBody>
+      </p:sp>
+      <p:sp>
+        <p:nvSpPr>
+          <p:cNvPr id="8" name="Rectangle 7"/>
+          <p:cNvSpPr/>
+          <p:nvPr/>
+        </p:nvSpPr>
+        <p:spPr>
+          <a:xfrm>
+            <a:off x="220000" y="1597864"/>
+            <a:ext cx="5774476" cy="2500000"/>
+          </a:xfrm>
+          <a:prstGeom prst="rect">
+            <a:avLst/>
+          </a:prstGeom>
+          <a:solidFill>
+            <a:srgbClr val="FFFFFF"/>
+          </a:solidFill>
+          <a:ln>
+            <a:noFill/>
+          </a:ln>
+        </p:spPr>
+        <p:style>
+          <a:lnRef idx="1">
+            <a:schemeClr val="accent1"/>
+          </a:lnRef>
+          <a:fillRef idx="3">
+            <a:schemeClr val="accent1"/>
+          </a:fillRef>
+          <a:effectRef idx="2">
+            <a:schemeClr val="accent1"/>
+          </a:effectRef>
+          <a:fontRef idx="minor">
+            <a:schemeClr val="lt1"/>
+          </a:fontRef>
+        </p:style>
+        <p:txBody>
+          <a:bodyPr rtlCol="0" anchor="ctr"/>
+          <a:lstStyle/>
+          <a:p>
+            <a:pPr algn="ctr"/>
+          </a:p>
+        </p:txBody>
+      </p:sp>
+      <p:sp>
+        <p:nvSpPr>
+          <p:cNvPr id="9" name="Rectangle 8"/>
+          <p:cNvSpPr/>
+          <p:nvPr/>
+        </p:nvSpPr>
+        <p:spPr>
+          <a:xfrm>
+            <a:off x="220000" y="1597864"/>
+            <a:ext cx="5774476" cy="330000"/>
+          </a:xfrm>
+          <a:prstGeom prst="rect">
+            <a:avLst/>
+          </a:prstGeom>
+          <a:solidFill>
+            <a:srgbClr val="2EA05A"/>
+          </a:solidFill>
+          <a:ln>
+            <a:noFill/>
+          </a:ln>
+        </p:spPr>
+        <p:style>
+          <a:lnRef idx="1">
+            <a:schemeClr val="accent1"/>
+          </a:lnRef>
+          <a:fillRef idx="3">
+            <a:schemeClr val="accent1"/>
+          </a:fillRef>
+          <a:effectRef idx="2">
+            <a:schemeClr val="accent1"/>
+          </a:effectRef>
+          <a:fontRef idx="minor">
+            <a:schemeClr val="lt1"/>
+          </a:fontRef>
+        </p:style>
+        <p:txBody>
+          <a:bodyPr rtlCol="0" anchor="ctr"/>
+          <a:lstStyle/>
+          <a:p>
+            <a:pPr algn="ctr"/>
+          </a:p>
+        </p:txBody>
+      </p:sp>
+      <p:sp>
+        <p:nvSpPr>
+          <p:cNvPr id="10" name="TextBox 9"/>
+          <p:cNvSpPr txBox="1"/>
+          <p:nvPr/>
+        </p:nvSpPr>
+        <p:spPr>
+          <a:xfrm>
+            <a:off x="290000" y="1662864"/>
+            <a:ext cx="5634476" cy="280000"/>
+          </a:xfrm>
+          <a:prstGeom prst="rect">
+            <a:avLst/>
+          </a:prstGeom>
+          <a:noFill/>
+        </p:spPr>
+        <p:txBody>
+          <a:bodyPr wrap="square">
+            <a:spAutoFit/>
+          </a:bodyPr>
+          <a:lstStyle/>
+          <a:p>
+            <a:pPr algn="l"/>
+            <a:r>
+              <a:rPr b="1" i="0" sz="1100">
+                <a:solidFill>
+                  <a:srgbClr val="FFFFFF"/>
+                </a:solidFill>
+              </a:rPr>
+              <a:t>RUN A  —  Empathy Build  →  SUCCEED  ★</a:t>
+            </a:r>
+          </a:p>
+        </p:txBody>
+      </p:sp>
+      <p:sp>
+        <p:nvSpPr>
+          <p:cNvPr id="11" name="TextBox 10"/>
+          <p:cNvSpPr txBox="1"/>
+          <p:nvPr/>
+        </p:nvSpPr>
+        <p:spPr>
+          <a:xfrm>
+            <a:off x="290000" y="1987864"/>
+            <a:ext cx="5634476" cy="2070000"/>
+          </a:xfrm>
+          <a:prstGeom prst="rect">
+            <a:avLst/>
+          </a:prstGeom>
+          <a:noFill/>
+        </p:spPr>
+        <p:txBody>
+          <a:bodyPr wrap="square">
+            <a:spAutoFit/>
+          </a:bodyPr>
+          <a:lstStyle/>
+          <a:p>
+            <a:r>
+              <a:rPr b="1" sz="1100">
+                <a:solidFill>
+                  <a:srgbClr val="0D2B45"/>
+                </a:solidFill>
+              </a:rPr>
+              <a:t>Skills: Authority 2  |  Diplomacy 5  |  Empathy 9  |  Manipulation 2</a:t>
+            </a:r>
+          </a:p>
+          <a:p>
+            <a:r>
+              <a:rPr b="0" sz="1100">
+                <a:solidFill>
+                  <a:srgbClr val="444455"/>
+                </a:solidFill>
+              </a:rPr>
+              <a:t/>
+            </a:r>
+          </a:p>
+          <a:p>
+            <a:r>
+              <a:rPr b="0" sz="1100">
+                <a:solidFill>
+                  <a:srgbClr val="444455"/>
+                </a:solidFill>
+              </a:rPr>
+              <a:t>Turn 1: empathy-weighted dice → open_empathy</a:t>
+            </a:r>
+          </a:p>
+          <a:p>
+            <a:r>
+              <a:rPr b="0" sz="1100">
+                <a:solidFill>
+                  <a:srgbClr val="2EA05A"/>
+                </a:solidFill>
+              </a:rPr>
+              <a:t>  Cognitive: ideological_filter bias (POSITIVE valence +0.45)</a:t>
+            </a:r>
+          </a:p>
+          <a:p>
+            <a:r>
+              <a:rPr b="0" sz="1100">
+                <a:solidFill>
+                  <a:srgbClr val="444455"/>
+                </a:solidFill>
+              </a:rPr>
+              <a:t>  Desire: affiliation</a:t>
+            </a:r>
+          </a:p>
+          <a:p>
+            <a:r>
+              <a:rPr b="0" sz="1100">
+                <a:solidFill>
+                  <a:srgbClr val="444455"/>
+                </a:solidFill>
+              </a:rPr>
+              <a:t>  Intention: "Accept Conditionally"  |  confrontation 0.3</a:t>
+            </a:r>
+          </a:p>
+          <a:p>
+            <a:r>
+              <a:rPr b="1" sz="1100">
+                <a:solidFill>
+                  <a:srgbClr val="2EA05A"/>
+                </a:solidFill>
+              </a:rPr>
+              <a:t>  relation_delta: +0.25</a:t>
+            </a:r>
+          </a:p>
+          <a:p>
+            <a:r>
+              <a:rPr b="0" sz="1100">
+                <a:solidFill>
+                  <a:srgbClr val="444455"/>
+                </a:solidFill>
+              </a:rPr>
+              <a:t/>
+            </a:r>
+          </a:p>
+          <a:p>
+            <a:r>
+              <a:rPr b="0" sz="1100">
+                <a:solidFill>
+                  <a:srgbClr val="444455"/>
+                </a:solidFill>
+              </a:rPr>
+              <a:t>Turn 2: shared values confirmed</a:t>
+            </a:r>
+          </a:p>
+          <a:p>
+            <a:r>
+              <a:rPr b="1" sz="1100">
+                <a:solidFill>
+                  <a:srgbClr val="2EA05A"/>
+                </a:solidFill>
+              </a:rPr>
+              <a:t>  relation crosses SUCCEED threshold → terminal SUCCEED</a:t>
+            </a:r>
+          </a:p>
+          <a:p>
+            <a:r>
+              <a:rPr b="0" sz="1100">
+                <a:solidFill>
+                  <a:srgbClr val="444455"/>
+                </a:solidFill>
+              </a:rPr>
+              <a:t/>
+            </a:r>
+          </a:p>
+          <a:p>
+            <a:r>
+              <a:rPr b="1" sz="1100">
+                <a:solidFill>
+                  <a:srgbClr val="2EA05A"/>
+                </a:solidFill>
+              </a:rPr>
+              <a:t>Final player_relation: 0.85</a:t>
+            </a:r>
+          </a:p>
+          <a:p>
+            <a:r>
+              <a:rPr b="1" sz="1100">
+                <a:solidFill>
+                  <a:srgbClr val="2EA05A"/>
+                </a:solidFill>
+              </a:rPr>
+              <a:t>Turns to terminal: 2</a:t>
+            </a:r>
+          </a:p>
+        </p:txBody>
+      </p:sp>
+      <p:sp>
+        <p:nvSpPr>
+          <p:cNvPr id="12" name="Rectangle 11"/>
+          <p:cNvSpPr/>
+          <p:nvPr/>
+        </p:nvSpPr>
+        <p:spPr>
+          <a:xfrm>
+            <a:off x="6194476" y="1597864"/>
+            <a:ext cx="5774476" cy="2500000"/>
+          </a:xfrm>
+          <a:prstGeom prst="rect">
+            <a:avLst/>
+          </a:prstGeom>
+          <a:solidFill>
+            <a:srgbClr val="FFFFFF"/>
+          </a:solidFill>
+          <a:ln>
+            <a:noFill/>
+          </a:ln>
+        </p:spPr>
+        <p:style>
+          <a:lnRef idx="1">
+            <a:schemeClr val="accent1"/>
+          </a:lnRef>
+          <a:fillRef idx="3">
+            <a:schemeClr val="accent1"/>
+          </a:fillRef>
+          <a:effectRef idx="2">
+            <a:schemeClr val="accent1"/>
+          </a:effectRef>
+          <a:fontRef idx="minor">
+            <a:schemeClr val="lt1"/>
+          </a:fontRef>
+        </p:style>
+        <p:txBody>
+          <a:bodyPr rtlCol="0" anchor="ctr"/>
+          <a:lstStyle/>
+          <a:p>
+            <a:pPr algn="ctr"/>
+          </a:p>
+        </p:txBody>
+      </p:sp>
+      <p:sp>
+        <p:nvSpPr>
+          <p:cNvPr id="13" name="Rectangle 12"/>
+          <p:cNvSpPr/>
+          <p:nvPr/>
+        </p:nvSpPr>
+        <p:spPr>
+          <a:xfrm>
+            <a:off x="6194476" y="1597864"/>
+            <a:ext cx="5774476" cy="330000"/>
+          </a:xfrm>
+          <a:prstGeom prst="rect">
+            <a:avLst/>
+          </a:prstGeom>
+          <a:solidFill>
+            <a:srgbClr val="C03A3A"/>
+          </a:solidFill>
+          <a:ln>
+            <a:noFill/>
+          </a:ln>
+        </p:spPr>
+        <p:style>
+          <a:lnRef idx="1">
+            <a:schemeClr val="accent1"/>
+          </a:lnRef>
+          <a:fillRef idx="3">
+            <a:schemeClr val="accent1"/>
+          </a:fillRef>
+          <a:effectRef idx="2">
+            <a:schemeClr val="accent1"/>
+          </a:effectRef>
+          <a:fontRef idx="minor">
+            <a:schemeClr val="lt1"/>
+          </a:fontRef>
+        </p:style>
+        <p:txBody>
+          <a:bodyPr rtlCol="0" anchor="ctr"/>
+          <a:lstStyle/>
+          <a:p>
+            <a:pPr algn="ctr"/>
+          </a:p>
+        </p:txBody>
+      </p:sp>
+      <p:sp>
+        <p:nvSpPr>
+          <p:cNvPr id="14" name="TextBox 13"/>
+          <p:cNvSpPr txBox="1"/>
+          <p:nvPr/>
+        </p:nvSpPr>
+        <p:spPr>
+          <a:xfrm>
+            <a:off x="6264476" y="1662864"/>
+            <a:ext cx="5634476" cy="280000"/>
+          </a:xfrm>
+          <a:prstGeom prst="rect">
+            <a:avLst/>
+          </a:prstGeom>
+          <a:noFill/>
+        </p:spPr>
+        <p:txBody>
+          <a:bodyPr wrap="square">
+            <a:spAutoFit/>
+          </a:bodyPr>
+          <a:lstStyle/>
+          <a:p>
+            <a:pPr algn="l"/>
+            <a:r>
+              <a:rPr b="1" i="0" sz="1100">
+                <a:solidFill>
+                  <a:srgbClr val="FFFFFF"/>
+                </a:solidFill>
+              </a:rPr>
+              <a:t>RUN B  —  Authority Build  →  FAIL  ✗</a:t>
+            </a:r>
+          </a:p>
+        </p:txBody>
+      </p:sp>
+      <p:sp>
+        <p:nvSpPr>
+          <p:cNvPr id="15" name="TextBox 14"/>
+          <p:cNvSpPr txBox="1"/>
+          <p:nvPr/>
+        </p:nvSpPr>
+        <p:spPr>
+          <a:xfrm>
+            <a:off x="6264476" y="1987864"/>
+            <a:ext cx="5634476" cy="2070000"/>
+          </a:xfrm>
+          <a:prstGeom prst="rect">
+            <a:avLst/>
+          </a:prstGeom>
+          <a:noFill/>
+        </p:spPr>
+        <p:txBody>
+          <a:bodyPr wrap="square">
+            <a:spAutoFit/>
+          </a:bodyPr>
+          <a:lstStyle/>
+          <a:p>
+            <a:r>
+              <a:rPr b="1" sz="1100">
+                <a:solidFill>
+                  <a:srgbClr val="0D2B45"/>
+                </a:solidFill>
+              </a:rPr>
+              <a:t>Skills: Authority 9  |  Diplomacy 5  |  Empathy 2  |  Manipulation 2</a:t>
+            </a:r>
+          </a:p>
+          <a:p>
+            <a:r>
+              <a:rPr b="0" sz="1100">
+                <a:solidFill>
+                  <a:srgbClr val="444455"/>
+                </a:solidFill>
+              </a:rPr>
+              <a:t/>
+            </a:r>
+          </a:p>
+          <a:p>
+            <a:r>
+              <a:rPr b="0" sz="1100">
+                <a:solidFill>
+                  <a:srgbClr val="444455"/>
+                </a:solidFill>
+              </a:rPr>
+              <a:t>Turn 1: authority-weighted dice → open_authority</a:t>
+            </a:r>
+          </a:p>
+          <a:p>
+            <a:r>
+              <a:rPr b="0" sz="1100">
+                <a:solidFill>
+                  <a:srgbClr val="C03A3A"/>
+                </a:solidFill>
+              </a:rPr>
+              <a:t>  Cognitive: black_white_thinking bias (NEGATIVE valence −0.45)</a:t>
+            </a:r>
+          </a:p>
+          <a:p>
+            <a:r>
+              <a:rPr b="0" sz="1100">
+                <a:solidFill>
+                  <a:srgbClr val="444455"/>
+                </a:solidFill>
+              </a:rPr>
+              <a:t>  Desire: dominance</a:t>
+            </a:r>
+          </a:p>
+          <a:p>
+            <a:r>
+              <a:rPr b="0" sz="1100">
+                <a:solidFill>
+                  <a:srgbClr val="444455"/>
+                </a:solidFill>
+              </a:rPr>
+              <a:t>  Intention: "Stand Firm"  |  confrontation 0.654</a:t>
+            </a:r>
+          </a:p>
+          <a:p>
+            <a:r>
+              <a:rPr b="1" sz="1100">
+                <a:solidFill>
+                  <a:srgbClr val="C03A3A"/>
+                </a:solidFill>
+              </a:rPr>
+              <a:t>  relation_delta: −0.15</a:t>
+            </a:r>
+          </a:p>
+          <a:p>
+            <a:r>
+              <a:rPr b="0" sz="1100">
+                <a:solidFill>
+                  <a:srgbClr val="444455"/>
+                </a:solidFill>
+              </a:rPr>
+              <a:t/>
+            </a:r>
+          </a:p>
+          <a:p>
+            <a:r>
+              <a:rPr b="0" sz="1100">
+                <a:solidFill>
+                  <a:srgbClr val="444455"/>
+                </a:solidFill>
+              </a:rPr>
+              <a:t>Turns 2–3: Troy's cog_flexibility = 0.1 locks in first impression.</a:t>
+            </a:r>
+          </a:p>
+          <a:p>
+            <a:r>
+              <a:rPr b="0" sz="1100">
+                <a:solidFill>
+                  <a:srgbClr val="444455"/>
+                </a:solidFill>
+              </a:rPr>
+              <a:t>  Recovery attempts fail — negative momentum compounds.</a:t>
+            </a:r>
+          </a:p>
+          <a:p>
+            <a:r>
+              <a:rPr b="1" sz="1100">
+                <a:solidFill>
+                  <a:srgbClr val="C03A3A"/>
+                </a:solidFill>
+              </a:rPr>
+              <a:t>  Terminal FAIL reached at turn 3.</a:t>
+            </a:r>
+          </a:p>
+          <a:p>
+            <a:r>
+              <a:rPr b="0" sz="1100">
+                <a:solidFill>
+                  <a:srgbClr val="444455"/>
+                </a:solidFill>
+              </a:rPr>
+              <a:t/>
+            </a:r>
+          </a:p>
+          <a:p>
+            <a:r>
+              <a:rPr b="1" sz="1100">
+                <a:solidFill>
+                  <a:srgbClr val="C03A3A"/>
+                </a:solidFill>
+              </a:rPr>
+              <a:t>Final player_relation: 0.2</a:t>
+            </a:r>
+          </a:p>
+          <a:p>
+            <a:r>
+              <a:rPr b="0" sz="1100">
+                <a:solidFill>
+                  <a:srgbClr val="444455"/>
+                </a:solidFill>
+              </a:rPr>
+              <a:t>cog_flexibility did not shift across any turn.</a:t>
+            </a:r>
+          </a:p>
+        </p:txBody>
+      </p:sp>
+      <p:sp>
+        <p:nvSpPr>
+          <p:cNvPr id="16" name="Rectangle 15"/>
+          <p:cNvSpPr/>
+          <p:nvPr/>
+        </p:nvSpPr>
+        <p:spPr>
+          <a:xfrm>
+            <a:off x="220000" y="4247864"/>
+            <a:ext cx="11748952" cy="2530136"/>
+          </a:xfrm>
+          <a:prstGeom prst="rect">
+            <a:avLst/>
+          </a:prstGeom>
+          <a:solidFill>
+            <a:srgbClr val="0D2B45"/>
+          </a:solidFill>
+          <a:ln>
+            <a:noFill/>
+          </a:ln>
+        </p:spPr>
+        <p:style>
+          <a:lnRef idx="1">
+            <a:schemeClr val="accent1"/>
+          </a:lnRef>
+          <a:fillRef idx="3">
+            <a:schemeClr val="accent1"/>
+          </a:fillRef>
+          <a:effectRef idx="2">
+            <a:schemeClr val="accent1"/>
+          </a:effectRef>
+          <a:fontRef idx="minor">
+            <a:schemeClr val="lt1"/>
+          </a:fontRef>
+        </p:style>
+        <p:txBody>
+          <a:bodyPr rtlCol="0" anchor="ctr"/>
+          <a:lstStyle/>
+          <a:p>
+            <a:pPr algn="ctr"/>
+          </a:p>
+        </p:txBody>
+      </p:sp>
+      <p:sp>
+        <p:nvSpPr>
+          <p:cNvPr id="17" name="TextBox 16"/>
+          <p:cNvSpPr txBox="1"/>
+          <p:nvPr/>
+        </p:nvSpPr>
+        <p:spPr>
+          <a:xfrm>
+            <a:off x="370000" y="4347864"/>
+            <a:ext cx="11448952" cy="2330136"/>
+          </a:xfrm>
+          <a:prstGeom prst="rect">
+            <a:avLst/>
+          </a:prstGeom>
+          <a:noFill/>
+        </p:spPr>
+        <p:txBody>
+          <a:bodyPr wrap="square">
+            <a:spAutoFit/>
+          </a:bodyPr>
+          <a:lstStyle/>
+          <a:p>
+            <a:r>
+              <a:rPr b="1" sz="1200">
+                <a:solidFill>
+                  <a:srgbClr val="2AB4C4"/>
+                </a:solidFill>
+              </a:rPr>
+              <a:t>Key finding:</a:t>
+            </a:r>
+          </a:p>
+          <a:p>
+            <a:r>
+              <a:rPr b="0" sz="1200">
+                <a:solidFill>
+                  <a:srgbClr val="FFFFFF"/>
+                </a:solidFill>
+              </a:rPr>
+              <a:t>Same NPC.  Same scenario.  Same choice pool.  Different skill distribution → different dice bias →</a:t>
+            </a:r>
+          </a:p>
+          <a:p>
+            <a:r>
+              <a:rPr b="0" sz="1200">
+                <a:solidFill>
+                  <a:srgbClr val="FFFFFF"/>
+                </a:solidFill>
+              </a:rPr>
+              <a:t>different bias activation → different desire → different intention → opposite terminal outcome.</a:t>
+            </a:r>
+          </a:p>
+          <a:p>
+            <a:r>
+              <a:rPr b="1" sz="1200">
+                <a:solidFill>
+                  <a:srgbClr val="2AB4C4"/>
+                </a:solidFill>
+              </a:rPr>
+              <a:t>Player agency is real, mechanically grounded, and fully traceable through the pipeline logs.</a:t>
             </a:r>
           </a:p>
         </p:txBody>
